--- a/lectures/QS_pitch_MDA_2026.pptx
+++ b/lectures/QS_pitch_MDA_2026.pptx
@@ -4154,8 +4154,8 @@
         </p:nvSpPr>
         <p:spPr>
           <a:xfrm>
-            <a:off x="1039166" y="2221656"/>
-            <a:ext cx="5611091" cy="646331"/>
+            <a:off x="638978" y="2221656"/>
+            <a:ext cx="6011279" cy="646331"/>
           </a:xfrm>
           <a:prstGeom prst="rect">
             <a:avLst/>
@@ -4639,7 +4639,7 @@
         <p:spPr>
           <a:xfrm>
             <a:off x="313280" y="1414456"/>
-            <a:ext cx="11565430" cy="1700787"/>
+            <a:ext cx="11565430" cy="2254720"/>
           </a:xfrm>
           <a:prstGeom prst="rect">
             <a:avLst/>
@@ -4663,7 +4663,7 @@
               <a:rPr lang="en-US" sz="2400" dirty="0">
                 <a:latin typeface="Helvetica" pitchFamily="2" charset="0"/>
               </a:rPr>
-              <a:t>want to understand the molecular mechanisms of form and function of organisms</a:t>
+              <a:t>want to understand the molecular mechanisms that underly the diversity of form and function of organisms</a:t>
             </a:r>
           </a:p>
           <a:p>
@@ -4693,7 +4693,7 @@
               <a:rPr lang="en-US" sz="2400" dirty="0">
                 <a:latin typeface="Helvetica" pitchFamily="2" charset="0"/>
               </a:rPr>
-              <a:t>like, or are curious about, working with truly ‘</a:t>
+              <a:t>are curious about working with truly ‘</a:t>
             </a:r>
             <a:r>
               <a:rPr lang="en-US" sz="2400" i="1" dirty="0">
@@ -4944,8 +4944,8 @@
         </p:nvSpPr>
         <p:spPr>
           <a:xfrm>
-            <a:off x="190231" y="1835799"/>
-            <a:ext cx="6199552" cy="3277820"/>
+            <a:off x="190230" y="1426726"/>
+            <a:ext cx="6441923" cy="5355312"/>
           </a:xfrm>
           <a:prstGeom prst="rect">
             <a:avLst/>
@@ -5043,6 +5043,43 @@
                 <a:latin typeface="Helvetica" pitchFamily="2" charset="0"/>
               </a:rPr>
               <a:t>Infer gene-regulatory networks</a:t>
+            </a:r>
+          </a:p>
+          <a:p>
+            <a:pPr marL="285750" indent="-285750">
+              <a:lnSpc>
+                <a:spcPct val="150000"/>
+              </a:lnSpc>
+              <a:buFont typeface="Arial" panose="020B0604020202020204" pitchFamily="34" charset="0"/>
+              <a:buChar char="•"/>
+            </a:pPr>
+            <a:endParaRPr lang="en-US" dirty="0">
+              <a:latin typeface="Helvetica" pitchFamily="2" charset="0"/>
+            </a:endParaRPr>
+          </a:p>
+          <a:p>
+            <a:pPr marL="285750" indent="-285750">
+              <a:lnSpc>
+                <a:spcPct val="150000"/>
+              </a:lnSpc>
+              <a:buFont typeface="Arial" panose="020B0604020202020204" pitchFamily="34" charset="0"/>
+              <a:buChar char="•"/>
+            </a:pPr>
+            <a:endParaRPr lang="en-US" dirty="0">
+              <a:latin typeface="Helvetica" pitchFamily="2" charset="0"/>
+            </a:endParaRPr>
+          </a:p>
+          <a:p>
+            <a:pPr>
+              <a:lnSpc>
+                <a:spcPct val="150000"/>
+              </a:lnSpc>
+            </a:pPr>
+            <a:r>
+              <a:rPr lang="en-US" dirty="0">
+                <a:latin typeface="Helvetica" pitchFamily="2" charset="0"/>
+              </a:rPr>
+              <a:t>These skills are highly relevant and sought after in academic research and industry (drug development, plant breeding, conservation ecology)</a:t>
             </a:r>
           </a:p>
           <a:p>

--- a/lectures/QS_pitch_MDA_2026.pptx
+++ b/lectures/QS_pitch_MDA_2026.pptx
@@ -200,7 +200,7 @@
           <a:p>
             <a:fld id="{D8B1E6A8-FC53-FE4D-B8D3-A5067DBF8E42}" type="datetimeFigureOut">
               <a:rPr lang="en-NL" smtClean="0"/>
-              <a:t>26/08/2026</a:t>
+              <a:t>28/08/2026</a:t>
             </a:fld>
             <a:endParaRPr lang="en-NL"/>
           </a:p>
@@ -810,7 +810,7 @@
           <a:p>
             <a:fld id="{1A985835-CC07-6F4B-9F71-9B303C0F427C}" type="datetimeFigureOut">
               <a:rPr lang="en-US" smtClean="0"/>
-              <a:t>8/26/26</a:t>
+              <a:t>8/28/26</a:t>
             </a:fld>
             <a:endParaRPr lang="en-US"/>
           </a:p>
@@ -1008,7 +1008,7 @@
           <a:p>
             <a:fld id="{1A985835-CC07-6F4B-9F71-9B303C0F427C}" type="datetimeFigureOut">
               <a:rPr lang="en-US" smtClean="0"/>
-              <a:t>8/26/26</a:t>
+              <a:t>8/28/26</a:t>
             </a:fld>
             <a:endParaRPr lang="en-US"/>
           </a:p>
@@ -1216,7 +1216,7 @@
           <a:p>
             <a:fld id="{1A985835-CC07-6F4B-9F71-9B303C0F427C}" type="datetimeFigureOut">
               <a:rPr lang="en-US" smtClean="0"/>
-              <a:t>8/26/26</a:t>
+              <a:t>8/28/26</a:t>
             </a:fld>
             <a:endParaRPr lang="en-US"/>
           </a:p>
@@ -1414,7 +1414,7 @@
           <a:p>
             <a:fld id="{1A985835-CC07-6F4B-9F71-9B303C0F427C}" type="datetimeFigureOut">
               <a:rPr lang="en-US" smtClean="0"/>
-              <a:t>8/26/26</a:t>
+              <a:t>8/28/26</a:t>
             </a:fld>
             <a:endParaRPr lang="en-US"/>
           </a:p>
@@ -1689,7 +1689,7 @@
           <a:p>
             <a:fld id="{1A985835-CC07-6F4B-9F71-9B303C0F427C}" type="datetimeFigureOut">
               <a:rPr lang="en-US" smtClean="0"/>
-              <a:t>8/26/26</a:t>
+              <a:t>8/28/26</a:t>
             </a:fld>
             <a:endParaRPr lang="en-US"/>
           </a:p>
@@ -1954,7 +1954,7 @@
           <a:p>
             <a:fld id="{1A985835-CC07-6F4B-9F71-9B303C0F427C}" type="datetimeFigureOut">
               <a:rPr lang="en-US" smtClean="0"/>
-              <a:t>8/26/26</a:t>
+              <a:t>8/28/26</a:t>
             </a:fld>
             <a:endParaRPr lang="en-US"/>
           </a:p>
@@ -2366,7 +2366,7 @@
           <a:p>
             <a:fld id="{1A985835-CC07-6F4B-9F71-9B303C0F427C}" type="datetimeFigureOut">
               <a:rPr lang="en-US" smtClean="0"/>
-              <a:t>8/26/26</a:t>
+              <a:t>8/28/26</a:t>
             </a:fld>
             <a:endParaRPr lang="en-US"/>
           </a:p>
@@ -2507,7 +2507,7 @@
           <a:p>
             <a:fld id="{1A985835-CC07-6F4B-9F71-9B303C0F427C}" type="datetimeFigureOut">
               <a:rPr lang="en-US" smtClean="0"/>
-              <a:t>8/26/26</a:t>
+              <a:t>8/28/26</a:t>
             </a:fld>
             <a:endParaRPr lang="en-US"/>
           </a:p>
@@ -2620,7 +2620,7 @@
           <a:p>
             <a:fld id="{1A985835-CC07-6F4B-9F71-9B303C0F427C}" type="datetimeFigureOut">
               <a:rPr lang="en-US" smtClean="0"/>
-              <a:t>8/26/26</a:t>
+              <a:t>8/28/26</a:t>
             </a:fld>
             <a:endParaRPr lang="en-US"/>
           </a:p>
@@ -2931,7 +2931,7 @@
           <a:p>
             <a:fld id="{1A985835-CC07-6F4B-9F71-9B303C0F427C}" type="datetimeFigureOut">
               <a:rPr lang="en-US" smtClean="0"/>
-              <a:t>8/26/26</a:t>
+              <a:t>8/28/26</a:t>
             </a:fld>
             <a:endParaRPr lang="en-US"/>
           </a:p>
@@ -3219,7 +3219,7 @@
           <a:p>
             <a:fld id="{1A985835-CC07-6F4B-9F71-9B303C0F427C}" type="datetimeFigureOut">
               <a:rPr lang="en-US" smtClean="0"/>
-              <a:t>8/26/26</a:t>
+              <a:t>8/28/26</a:t>
             </a:fld>
             <a:endParaRPr lang="en-US"/>
           </a:p>
@@ -3460,7 +3460,7 @@
           <a:p>
             <a:fld id="{1A985835-CC07-6F4B-9F71-9B303C0F427C}" type="datetimeFigureOut">
               <a:rPr lang="en-US" smtClean="0"/>
-              <a:t>8/26/26</a:t>
+              <a:t>8/28/26</a:t>
             </a:fld>
             <a:endParaRPr lang="en-US"/>
           </a:p>
@@ -4371,8 +4371,8 @@
         </p:nvSpPr>
         <p:spPr>
           <a:xfrm>
-            <a:off x="167391" y="3042501"/>
-            <a:ext cx="6479194" cy="646331"/>
+            <a:off x="167391" y="2932575"/>
+            <a:ext cx="6479194" cy="923330"/>
           </a:xfrm>
           <a:prstGeom prst="rect">
             <a:avLst/>
@@ -4402,6 +4402,15 @@
               <a:t>Which genes are affected by a certain treatment or mutation?</a:t>
             </a:r>
           </a:p>
+          <a:p>
+            <a:pPr algn="r"/>
+            <a:r>
+              <a:rPr lang="en-US" i="1" dirty="0">
+                <a:latin typeface="Helvetica" pitchFamily="2" charset="0"/>
+              </a:rPr>
+              <a:t>How can we build gene regulatory networks?</a:t>
+            </a:r>
+          </a:p>
         </p:txBody>
       </p:sp>
       <p:sp>
@@ -4418,7 +4427,7 @@
         </p:nvSpPr>
         <p:spPr>
           <a:xfrm>
-            <a:off x="167391" y="3835730"/>
+            <a:off x="167391" y="3973363"/>
             <a:ext cx="6479194" cy="646331"/>
           </a:xfrm>
           <a:prstGeom prst="rect">
@@ -5307,7 +5316,7 @@
         </p:blipFill>
         <p:spPr>
           <a:xfrm>
-            <a:off x="6823129" y="2153453"/>
+            <a:off x="6801095" y="1734812"/>
             <a:ext cx="4535276" cy="2551093"/>
           </a:xfrm>
           <a:prstGeom prst="rect">
@@ -5360,7 +5369,7 @@
         <p:spPr>
           <a:xfrm>
             <a:off x="6244361" y="1131600"/>
-            <a:ext cx="5404236" cy="1714187"/>
+            <a:ext cx="5404236" cy="2129686"/>
           </a:xfrm>
           <a:prstGeom prst="rect">
             <a:avLst/>
@@ -5422,6 +5431,19 @@
                 <a:latin typeface="Helvetica" pitchFamily="2" charset="0"/>
               </a:rPr>
               <a:t>Aalt-Jan van Dijk (Biosystems Data Analysis, SILS)</a:t>
+            </a:r>
+          </a:p>
+          <a:p>
+            <a:pPr>
+              <a:lnSpc>
+                <a:spcPct val="150000"/>
+              </a:lnSpc>
+            </a:pPr>
+            <a:r>
+              <a:rPr lang="en-US" dirty="0">
+                <a:latin typeface="Helvetica" pitchFamily="2" charset="0"/>
+              </a:rPr>
+              <a:t>Kyran Wissink (Biosystems Data Analysis, SILS)</a:t>
             </a:r>
           </a:p>
         </p:txBody>
@@ -5522,7 +5544,7 @@
         <p:spPr>
           <a:xfrm>
             <a:off x="543403" y="3153573"/>
-            <a:ext cx="3897221" cy="883190"/>
+            <a:ext cx="1960793" cy="883190"/>
           </a:xfrm>
           <a:prstGeom prst="rect">
             <a:avLst/>
@@ -5559,7 +5581,7 @@
               <a:rPr lang="en-US" dirty="0">
                 <a:latin typeface="Helvetica" pitchFamily="2" charset="0"/>
               </a:rPr>
-              <a:t>2x assignment, 1x mini oral exam</a:t>
+              <a:t>2x assignment</a:t>
             </a:r>
           </a:p>
         </p:txBody>

--- a/lectures/QS_pitch_MDA_2026.pptx
+++ b/lectures/QS_pitch_MDA_2026.pptx
@@ -200,7 +200,7 @@
           <a:p>
             <a:fld id="{D8B1E6A8-FC53-FE4D-B8D3-A5067DBF8E42}" type="datetimeFigureOut">
               <a:rPr lang="en-NL" smtClean="0"/>
-              <a:t>28/08/2026</a:t>
+              <a:t>02/09/2026</a:t>
             </a:fld>
             <a:endParaRPr lang="en-NL"/>
           </a:p>
@@ -810,7 +810,7 @@
           <a:p>
             <a:fld id="{1A985835-CC07-6F4B-9F71-9B303C0F427C}" type="datetimeFigureOut">
               <a:rPr lang="en-US" smtClean="0"/>
-              <a:t>8/28/26</a:t>
+              <a:t>9/2/26</a:t>
             </a:fld>
             <a:endParaRPr lang="en-US"/>
           </a:p>
@@ -1008,7 +1008,7 @@
           <a:p>
             <a:fld id="{1A985835-CC07-6F4B-9F71-9B303C0F427C}" type="datetimeFigureOut">
               <a:rPr lang="en-US" smtClean="0"/>
-              <a:t>8/28/26</a:t>
+              <a:t>9/2/26</a:t>
             </a:fld>
             <a:endParaRPr lang="en-US"/>
           </a:p>
@@ -1216,7 +1216,7 @@
           <a:p>
             <a:fld id="{1A985835-CC07-6F4B-9F71-9B303C0F427C}" type="datetimeFigureOut">
               <a:rPr lang="en-US" smtClean="0"/>
-              <a:t>8/28/26</a:t>
+              <a:t>9/2/26</a:t>
             </a:fld>
             <a:endParaRPr lang="en-US"/>
           </a:p>
@@ -1414,7 +1414,7 @@
           <a:p>
             <a:fld id="{1A985835-CC07-6F4B-9F71-9B303C0F427C}" type="datetimeFigureOut">
               <a:rPr lang="en-US" smtClean="0"/>
-              <a:t>8/28/26</a:t>
+              <a:t>9/2/26</a:t>
             </a:fld>
             <a:endParaRPr lang="en-US"/>
           </a:p>
@@ -1689,7 +1689,7 @@
           <a:p>
             <a:fld id="{1A985835-CC07-6F4B-9F71-9B303C0F427C}" type="datetimeFigureOut">
               <a:rPr lang="en-US" smtClean="0"/>
-              <a:t>8/28/26</a:t>
+              <a:t>9/2/26</a:t>
             </a:fld>
             <a:endParaRPr lang="en-US"/>
           </a:p>
@@ -1954,7 +1954,7 @@
           <a:p>
             <a:fld id="{1A985835-CC07-6F4B-9F71-9B303C0F427C}" type="datetimeFigureOut">
               <a:rPr lang="en-US" smtClean="0"/>
-              <a:t>8/28/26</a:t>
+              <a:t>9/2/26</a:t>
             </a:fld>
             <a:endParaRPr lang="en-US"/>
           </a:p>
@@ -2366,7 +2366,7 @@
           <a:p>
             <a:fld id="{1A985835-CC07-6F4B-9F71-9B303C0F427C}" type="datetimeFigureOut">
               <a:rPr lang="en-US" smtClean="0"/>
-              <a:t>8/28/26</a:t>
+              <a:t>9/2/26</a:t>
             </a:fld>
             <a:endParaRPr lang="en-US"/>
           </a:p>
@@ -2507,7 +2507,7 @@
           <a:p>
             <a:fld id="{1A985835-CC07-6F4B-9F71-9B303C0F427C}" type="datetimeFigureOut">
               <a:rPr lang="en-US" smtClean="0"/>
-              <a:t>8/28/26</a:t>
+              <a:t>9/2/26</a:t>
             </a:fld>
             <a:endParaRPr lang="en-US"/>
           </a:p>
@@ -2620,7 +2620,7 @@
           <a:p>
             <a:fld id="{1A985835-CC07-6F4B-9F71-9B303C0F427C}" type="datetimeFigureOut">
               <a:rPr lang="en-US" smtClean="0"/>
-              <a:t>8/28/26</a:t>
+              <a:t>9/2/26</a:t>
             </a:fld>
             <a:endParaRPr lang="en-US"/>
           </a:p>
@@ -2931,7 +2931,7 @@
           <a:p>
             <a:fld id="{1A985835-CC07-6F4B-9F71-9B303C0F427C}" type="datetimeFigureOut">
               <a:rPr lang="en-US" smtClean="0"/>
-              <a:t>8/28/26</a:t>
+              <a:t>9/2/26</a:t>
             </a:fld>
             <a:endParaRPr lang="en-US"/>
           </a:p>
@@ -3219,7 +3219,7 @@
           <a:p>
             <a:fld id="{1A985835-CC07-6F4B-9F71-9B303C0F427C}" type="datetimeFigureOut">
               <a:rPr lang="en-US" smtClean="0"/>
-              <a:t>8/28/26</a:t>
+              <a:t>9/2/26</a:t>
             </a:fld>
             <a:endParaRPr lang="en-US"/>
           </a:p>
@@ -3460,7 +3460,7 @@
           <a:p>
             <a:fld id="{1A985835-CC07-6F4B-9F71-9B303C0F427C}" type="datetimeFigureOut">
               <a:rPr lang="en-US" smtClean="0"/>
-              <a:t>8/28/26</a:t>
+              <a:t>9/2/26</a:t>
             </a:fld>
             <a:endParaRPr lang="en-US"/>
           </a:p>
@@ -4777,7 +4777,7 @@
               <a:rPr lang="en-US" i="1" dirty="0">
                 <a:latin typeface="Helvetica" pitchFamily="2" charset="0"/>
               </a:rPr>
-              <a:t>some experience in with programming in R</a:t>
+              <a:t>some experience with programming in R</a:t>
             </a:r>
           </a:p>
           <a:p>
@@ -4795,7 +4795,7 @@
                 </a:solidFill>
                 <a:latin typeface="Helvetica" pitchFamily="2" charset="0"/>
               </a:rPr>
-              <a:t>familiar with with basic concepts in molecular biology &amp; genetics</a:t>
+              <a:t>familiar with basic concepts in molecular biology &amp; genetics</a:t>
             </a:r>
           </a:p>
         </p:txBody>

--- a/lectures/QS_pitch_MDA_2026.pptx
+++ b/lectures/QS_pitch_MDA_2026.pptx
@@ -5,13 +5,15 @@
     <p:sldMasterId id="2147483648" r:id="rId1"/>
   </p:sldMasterIdLst>
   <p:notesMasterIdLst>
-    <p:notesMasterId r:id="rId6"/>
+    <p:notesMasterId r:id="rId8"/>
   </p:notesMasterIdLst>
   <p:sldIdLst>
     <p:sldId id="259" r:id="rId2"/>
     <p:sldId id="260" r:id="rId3"/>
-    <p:sldId id="261" r:id="rId4"/>
-    <p:sldId id="256" r:id="rId5"/>
+    <p:sldId id="264" r:id="rId4"/>
+    <p:sldId id="261" r:id="rId5"/>
+    <p:sldId id="263" r:id="rId6"/>
+    <p:sldId id="256" r:id="rId7"/>
   </p:sldIdLst>
   <p:sldSz cx="12192000" cy="6858000"/>
   <p:notesSz cx="6858000" cy="9144000"/>
@@ -200,7 +202,7 @@
           <a:p>
             <a:fld id="{D8B1E6A8-FC53-FE4D-B8D3-A5067DBF8E42}" type="datetimeFigureOut">
               <a:rPr lang="en-NL" smtClean="0"/>
-              <a:t>02/09/2026</a:t>
+              <a:t>15/09/2026</a:t>
             </a:fld>
             <a:endParaRPr lang="en-NL"/>
           </a:p>
@@ -644,7 +646,7 @@
           <a:p>
             <a:fld id="{53E64538-61E5-8542-9044-22695E5C0896}" type="slidenum">
               <a:rPr lang="en-NL" smtClean="0"/>
-              <a:t>3</a:t>
+              <a:t>4</a:t>
             </a:fld>
             <a:endParaRPr lang="en-NL"/>
           </a:p>
@@ -654,6 +656,90 @@
     <p:extLst>
       <p:ext uri="{BB962C8B-B14F-4D97-AF65-F5344CB8AC3E}">
         <p14:creationId xmlns:p14="http://schemas.microsoft.com/office/powerpoint/2010/main" val="3009292573"/>
+      </p:ext>
+    </p:extLst>
+  </p:cSld>
+  <p:clrMapOvr>
+    <a:masterClrMapping/>
+  </p:clrMapOvr>
+</p:notes>
+</file>
+
+<file path=ppt/notesSlides/notesSlide3.xml><?xml version="1.0" encoding="utf-8"?>
+<p:notes xmlns:a="http://schemas.openxmlformats.org/drawingml/2006/main" xmlns:r="http://schemas.openxmlformats.org/officeDocument/2006/relationships" xmlns:p="http://schemas.openxmlformats.org/presentationml/2006/main">
+  <p:cSld>
+    <p:spTree>
+      <p:nvGrpSpPr>
+        <p:cNvPr id="1" name=""/>
+        <p:cNvGrpSpPr/>
+        <p:nvPr/>
+      </p:nvGrpSpPr>
+      <p:grpSpPr>
+        <a:xfrm>
+          <a:off x="0" y="0"/>
+          <a:ext cx="0" cy="0"/>
+          <a:chOff x="0" y="0"/>
+          <a:chExt cx="0" cy="0"/>
+        </a:xfrm>
+      </p:grpSpPr>
+      <p:sp>
+        <p:nvSpPr>
+          <p:cNvPr id="2" name="Slide Image Placeholder 1"/>
+          <p:cNvSpPr>
+            <a:spLocks noGrp="1" noRot="1" noChangeAspect="1"/>
+          </p:cNvSpPr>
+          <p:nvPr>
+            <p:ph type="sldImg"/>
+          </p:nvPr>
+        </p:nvSpPr>
+        <p:spPr/>
+      </p:sp>
+      <p:sp>
+        <p:nvSpPr>
+          <p:cNvPr id="3" name="Notes Placeholder 2"/>
+          <p:cNvSpPr>
+            <a:spLocks noGrp="1"/>
+          </p:cNvSpPr>
+          <p:nvPr>
+            <p:ph type="body" idx="1"/>
+          </p:nvPr>
+        </p:nvSpPr>
+        <p:spPr/>
+        <p:txBody>
+          <a:bodyPr/>
+          <a:lstStyle/>
+          <a:p>
+            <a:endParaRPr lang="en-NL" dirty="0"/>
+          </a:p>
+        </p:txBody>
+      </p:sp>
+      <p:sp>
+        <p:nvSpPr>
+          <p:cNvPr id="4" name="Slide Number Placeholder 3"/>
+          <p:cNvSpPr>
+            <a:spLocks noGrp="1"/>
+          </p:cNvSpPr>
+          <p:nvPr>
+            <p:ph type="sldNum" sz="quarter" idx="5"/>
+          </p:nvPr>
+        </p:nvSpPr>
+        <p:spPr/>
+        <p:txBody>
+          <a:bodyPr/>
+          <a:lstStyle/>
+          <a:p>
+            <a:fld id="{53E64538-61E5-8542-9044-22695E5C0896}" type="slidenum">
+              <a:rPr lang="en-NL" smtClean="0"/>
+              <a:t>6</a:t>
+            </a:fld>
+            <a:endParaRPr lang="en-NL"/>
+          </a:p>
+        </p:txBody>
+      </p:sp>
+    </p:spTree>
+    <p:extLst>
+      <p:ext uri="{BB962C8B-B14F-4D97-AF65-F5344CB8AC3E}">
+        <p14:creationId xmlns:p14="http://schemas.microsoft.com/office/powerpoint/2010/main" val="2970154627"/>
       </p:ext>
     </p:extLst>
   </p:cSld>
@@ -810,7 +896,7 @@
           <a:p>
             <a:fld id="{1A985835-CC07-6F4B-9F71-9B303C0F427C}" type="datetimeFigureOut">
               <a:rPr lang="en-US" smtClean="0"/>
-              <a:t>9/2/26</a:t>
+              <a:t>9/15/26</a:t>
             </a:fld>
             <a:endParaRPr lang="en-US"/>
           </a:p>
@@ -1008,7 +1094,7 @@
           <a:p>
             <a:fld id="{1A985835-CC07-6F4B-9F71-9B303C0F427C}" type="datetimeFigureOut">
               <a:rPr lang="en-US" smtClean="0"/>
-              <a:t>9/2/26</a:t>
+              <a:t>9/15/26</a:t>
             </a:fld>
             <a:endParaRPr lang="en-US"/>
           </a:p>
@@ -1216,7 +1302,7 @@
           <a:p>
             <a:fld id="{1A985835-CC07-6F4B-9F71-9B303C0F427C}" type="datetimeFigureOut">
               <a:rPr lang="en-US" smtClean="0"/>
-              <a:t>9/2/26</a:t>
+              <a:t>9/15/26</a:t>
             </a:fld>
             <a:endParaRPr lang="en-US"/>
           </a:p>
@@ -1414,7 +1500,7 @@
           <a:p>
             <a:fld id="{1A985835-CC07-6F4B-9F71-9B303C0F427C}" type="datetimeFigureOut">
               <a:rPr lang="en-US" smtClean="0"/>
-              <a:t>9/2/26</a:t>
+              <a:t>9/15/26</a:t>
             </a:fld>
             <a:endParaRPr lang="en-US"/>
           </a:p>
@@ -1689,7 +1775,7 @@
           <a:p>
             <a:fld id="{1A985835-CC07-6F4B-9F71-9B303C0F427C}" type="datetimeFigureOut">
               <a:rPr lang="en-US" smtClean="0"/>
-              <a:t>9/2/26</a:t>
+              <a:t>9/15/26</a:t>
             </a:fld>
             <a:endParaRPr lang="en-US"/>
           </a:p>
@@ -1954,7 +2040,7 @@
           <a:p>
             <a:fld id="{1A985835-CC07-6F4B-9F71-9B303C0F427C}" type="datetimeFigureOut">
               <a:rPr lang="en-US" smtClean="0"/>
-              <a:t>9/2/26</a:t>
+              <a:t>9/15/26</a:t>
             </a:fld>
             <a:endParaRPr lang="en-US"/>
           </a:p>
@@ -2366,7 +2452,7 @@
           <a:p>
             <a:fld id="{1A985835-CC07-6F4B-9F71-9B303C0F427C}" type="datetimeFigureOut">
               <a:rPr lang="en-US" smtClean="0"/>
-              <a:t>9/2/26</a:t>
+              <a:t>9/15/26</a:t>
             </a:fld>
             <a:endParaRPr lang="en-US"/>
           </a:p>
@@ -2507,7 +2593,7 @@
           <a:p>
             <a:fld id="{1A985835-CC07-6F4B-9F71-9B303C0F427C}" type="datetimeFigureOut">
               <a:rPr lang="en-US" smtClean="0"/>
-              <a:t>9/2/26</a:t>
+              <a:t>9/15/26</a:t>
             </a:fld>
             <a:endParaRPr lang="en-US"/>
           </a:p>
@@ -2620,7 +2706,7 @@
           <a:p>
             <a:fld id="{1A985835-CC07-6F4B-9F71-9B303C0F427C}" type="datetimeFigureOut">
               <a:rPr lang="en-US" smtClean="0"/>
-              <a:t>9/2/26</a:t>
+              <a:t>9/15/26</a:t>
             </a:fld>
             <a:endParaRPr lang="en-US"/>
           </a:p>
@@ -2931,7 +3017,7 @@
           <a:p>
             <a:fld id="{1A985835-CC07-6F4B-9F71-9B303C0F427C}" type="datetimeFigureOut">
               <a:rPr lang="en-US" smtClean="0"/>
-              <a:t>9/2/26</a:t>
+              <a:t>9/15/26</a:t>
             </a:fld>
             <a:endParaRPr lang="en-US"/>
           </a:p>
@@ -3219,7 +3305,7 @@
           <a:p>
             <a:fld id="{1A985835-CC07-6F4B-9F71-9B303C0F427C}" type="datetimeFigureOut">
               <a:rPr lang="en-US" smtClean="0"/>
-              <a:t>9/2/26</a:t>
+              <a:t>9/15/26</a:t>
             </a:fld>
             <a:endParaRPr lang="en-US"/>
           </a:p>
@@ -3460,7 +3546,7 @@
           <a:p>
             <a:fld id="{1A985835-CC07-6F4B-9F71-9B303C0F427C}" type="datetimeFigureOut">
               <a:rPr lang="en-US" smtClean="0"/>
-              <a:t>9/2/26</a:t>
+              <a:t>9/15/26</a:t>
             </a:fld>
             <a:endParaRPr lang="en-US"/>
           </a:p>
@@ -4102,8 +4188,8 @@
         </p:blipFill>
         <p:spPr>
           <a:xfrm>
-            <a:off x="60007" y="6401747"/>
-            <a:ext cx="3817930" cy="413221"/>
+            <a:off x="60007" y="6512638"/>
+            <a:ext cx="2793362" cy="302330"/>
           </a:xfrm>
           <a:prstGeom prst="rect">
             <a:avLst/>
@@ -4154,7 +4240,7 @@
         </p:nvSpPr>
         <p:spPr>
           <a:xfrm>
-            <a:off x="638978" y="2221656"/>
+            <a:off x="848298" y="2227158"/>
             <a:ext cx="6011279" cy="646331"/>
           </a:xfrm>
           <a:prstGeom prst="rect">
@@ -4182,7 +4268,7 @@
               <a:rPr lang="en-US" i="1" dirty="0">
                 <a:latin typeface="Helvetica" pitchFamily="2" charset="0"/>
               </a:rPr>
-              <a:t>Which genetic features does this organism have?</a:t>
+              <a:t>What can we learn from the genome of this organism?</a:t>
             </a:r>
           </a:p>
         </p:txBody>
@@ -4371,7 +4457,63 @@
         </p:nvSpPr>
         <p:spPr>
           <a:xfrm>
-            <a:off x="167391" y="2932575"/>
+            <a:off x="0" y="2938077"/>
+            <a:ext cx="6855905" cy="923330"/>
+          </a:xfrm>
+          <a:prstGeom prst="rect">
+            <a:avLst/>
+          </a:prstGeom>
+          <a:noFill/>
+        </p:spPr>
+        <p:txBody>
+          <a:bodyPr wrap="square" rtlCol="0">
+            <a:spAutoFit/>
+          </a:bodyPr>
+          <a:lstStyle/>
+          <a:p>
+            <a:pPr algn="r"/>
+            <a:r>
+              <a:rPr lang="en-US" b="1" dirty="0">
+                <a:latin typeface="Helvetica" pitchFamily="2" charset="0"/>
+              </a:rPr>
+              <a:t>RNA-seq</a:t>
+            </a:r>
+          </a:p>
+          <a:p>
+            <a:pPr algn="r"/>
+            <a:r>
+              <a:rPr lang="en-US" i="1" dirty="0">
+                <a:latin typeface="Helvetica" pitchFamily="2" charset="0"/>
+              </a:rPr>
+              <a:t>Which pathways are affected by a certain treatment or mutation?</a:t>
+            </a:r>
+          </a:p>
+          <a:p>
+            <a:pPr algn="r"/>
+            <a:r>
+              <a:rPr lang="en-US" i="1" dirty="0">
+                <a:latin typeface="Helvetica" pitchFamily="2" charset="0"/>
+              </a:rPr>
+              <a:t>How can we build gene regulatory networks?</a:t>
+            </a:r>
+          </a:p>
+        </p:txBody>
+      </p:sp>
+      <p:sp>
+        <p:nvSpPr>
+          <p:cNvPr id="29" name="TextBox 28">
+            <a:extLst>
+              <a:ext uri="{FF2B5EF4-FFF2-40B4-BE49-F238E27FC236}">
+                <a16:creationId xmlns:a16="http://schemas.microsoft.com/office/drawing/2014/main" id="{05014363-1F1A-0F47-4F81-FC775FEDBAEB}"/>
+              </a:ext>
+            </a:extLst>
+          </p:cNvPr>
+          <p:cNvSpPr txBox="1"/>
+          <p:nvPr/>
+        </p:nvSpPr>
+        <p:spPr>
+          <a:xfrm>
+            <a:off x="376711" y="3978865"/>
             <a:ext cx="6479194" cy="923330"/>
           </a:xfrm>
           <a:prstGeom prst="rect">
@@ -4390,7 +4532,7 @@
               <a:rPr lang="en-US" b="1" dirty="0">
                 <a:latin typeface="Helvetica" pitchFamily="2" charset="0"/>
               </a:rPr>
-              <a:t>RNA-seq</a:t>
+              <a:t>Single-cell RNA-seq</a:t>
             </a:r>
           </a:p>
           <a:p>
@@ -4399,7 +4541,7 @@
               <a:rPr lang="en-US" i="1" dirty="0">
                 <a:latin typeface="Helvetica" pitchFamily="2" charset="0"/>
               </a:rPr>
-              <a:t>Which genes are affected by a certain treatment or mutation?</a:t>
+              <a:t>Specialized cell types perform specialized functions</a:t>
             </a:r>
           </a:p>
           <a:p>
@@ -4408,54 +4550,7 @@
               <a:rPr lang="en-US" i="1" dirty="0">
                 <a:latin typeface="Helvetica" pitchFamily="2" charset="0"/>
               </a:rPr>
-              <a:t>How can we build gene regulatory networks?</a:t>
-            </a:r>
-          </a:p>
-        </p:txBody>
-      </p:sp>
-      <p:sp>
-        <p:nvSpPr>
-          <p:cNvPr id="29" name="TextBox 28">
-            <a:extLst>
-              <a:ext uri="{FF2B5EF4-FFF2-40B4-BE49-F238E27FC236}">
-                <a16:creationId xmlns:a16="http://schemas.microsoft.com/office/drawing/2014/main" id="{05014363-1F1A-0F47-4F81-FC775FEDBAEB}"/>
-              </a:ext>
-            </a:extLst>
-          </p:cNvPr>
-          <p:cNvSpPr txBox="1"/>
-          <p:nvPr/>
-        </p:nvSpPr>
-        <p:spPr>
-          <a:xfrm>
-            <a:off x="167391" y="3973363"/>
-            <a:ext cx="6479194" cy="646331"/>
-          </a:xfrm>
-          <a:prstGeom prst="rect">
-            <a:avLst/>
-          </a:prstGeom>
-          <a:noFill/>
-        </p:spPr>
-        <p:txBody>
-          <a:bodyPr wrap="square" rtlCol="0">
-            <a:spAutoFit/>
-          </a:bodyPr>
-          <a:lstStyle/>
-          <a:p>
-            <a:pPr algn="r"/>
-            <a:r>
-              <a:rPr lang="en-US" b="1" dirty="0">
-                <a:latin typeface="Helvetica" pitchFamily="2" charset="0"/>
-              </a:rPr>
-              <a:t>Single-cell RNA-seq</a:t>
-            </a:r>
-          </a:p>
-          <a:p>
-            <a:pPr algn="r"/>
-            <a:r>
-              <a:rPr lang="en-US" i="1" dirty="0">
-                <a:latin typeface="Helvetica" pitchFamily="2" charset="0"/>
-              </a:rPr>
-              <a:t>Specialized cell types perform specialized functions</a:t>
+              <a:t>How can we untangle that?</a:t>
             </a:r>
           </a:p>
         </p:txBody>
@@ -4514,6 +4609,257 @@
   <p:clrMapOvr>
     <a:masterClrMapping/>
   </p:clrMapOvr>
+  <p:timing>
+    <p:tnLst>
+      <p:par>
+        <p:cTn id="1" dur="indefinite" restart="never" nodeType="tmRoot">
+          <p:childTnLst>
+            <p:seq concurrent="1" nextAc="seek">
+              <p:cTn id="2" dur="indefinite" nodeType="mainSeq">
+                <p:childTnLst>
+                  <p:par>
+                    <p:cTn id="3" fill="hold">
+                      <p:stCondLst>
+                        <p:cond delay="indefinite"/>
+                      </p:stCondLst>
+                      <p:childTnLst>
+                        <p:par>
+                          <p:cTn id="4" fill="hold">
+                            <p:stCondLst>
+                              <p:cond delay="0"/>
+                            </p:stCondLst>
+                            <p:childTnLst>
+                              <p:par>
+                                <p:cTn id="5" presetID="1" presetClass="entr" presetSubtype="0" fill="hold" grpId="0" nodeType="clickEffect">
+                                  <p:stCondLst>
+                                    <p:cond delay="0"/>
+                                  </p:stCondLst>
+                                  <p:childTnLst>
+                                    <p:set>
+                                      <p:cBhvr>
+                                        <p:cTn id="6" dur="1" fill="hold">
+                                          <p:stCondLst>
+                                            <p:cond delay="0"/>
+                                          </p:stCondLst>
+                                        </p:cTn>
+                                        <p:tgtEl>
+                                          <p:spTgt spid="3"/>
+                                        </p:tgtEl>
+                                        <p:attrNameLst>
+                                          <p:attrName>style.visibility</p:attrName>
+                                        </p:attrNameLst>
+                                      </p:cBhvr>
+                                      <p:to>
+                                        <p:strVal val="visible"/>
+                                      </p:to>
+                                    </p:set>
+                                  </p:childTnLst>
+                                </p:cTn>
+                              </p:par>
+                              <p:par>
+                                <p:cTn id="7" presetID="1" presetClass="entr" presetSubtype="0" fill="hold" nodeType="withEffect">
+                                  <p:stCondLst>
+                                    <p:cond delay="0"/>
+                                  </p:stCondLst>
+                                  <p:childTnLst>
+                                    <p:set>
+                                      <p:cBhvr>
+                                        <p:cTn id="8" dur="1" fill="hold">
+                                          <p:stCondLst>
+                                            <p:cond delay="0"/>
+                                          </p:stCondLst>
+                                        </p:cTn>
+                                        <p:tgtEl>
+                                          <p:spTgt spid="6"/>
+                                        </p:tgtEl>
+                                        <p:attrNameLst>
+                                          <p:attrName>style.visibility</p:attrName>
+                                        </p:attrNameLst>
+                                      </p:cBhvr>
+                                      <p:to>
+                                        <p:strVal val="visible"/>
+                                      </p:to>
+                                    </p:set>
+                                  </p:childTnLst>
+                                </p:cTn>
+                              </p:par>
+                            </p:childTnLst>
+                          </p:cTn>
+                        </p:par>
+                      </p:childTnLst>
+                    </p:cTn>
+                  </p:par>
+                  <p:par>
+                    <p:cTn id="9" fill="hold">
+                      <p:stCondLst>
+                        <p:cond delay="indefinite"/>
+                      </p:stCondLst>
+                      <p:childTnLst>
+                        <p:par>
+                          <p:cTn id="10" fill="hold">
+                            <p:stCondLst>
+                              <p:cond delay="0"/>
+                            </p:stCondLst>
+                            <p:childTnLst>
+                              <p:par>
+                                <p:cTn id="11" presetID="1" presetClass="entr" presetSubtype="0" fill="hold" grpId="0" nodeType="clickEffect">
+                                  <p:stCondLst>
+                                    <p:cond delay="0"/>
+                                  </p:stCondLst>
+                                  <p:childTnLst>
+                                    <p:set>
+                                      <p:cBhvr>
+                                        <p:cTn id="12" dur="1" fill="hold">
+                                          <p:stCondLst>
+                                            <p:cond delay="0"/>
+                                          </p:stCondLst>
+                                        </p:cTn>
+                                        <p:tgtEl>
+                                          <p:spTgt spid="21"/>
+                                        </p:tgtEl>
+                                        <p:attrNameLst>
+                                          <p:attrName>style.visibility</p:attrName>
+                                        </p:attrNameLst>
+                                      </p:cBhvr>
+                                      <p:to>
+                                        <p:strVal val="visible"/>
+                                      </p:to>
+                                    </p:set>
+                                  </p:childTnLst>
+                                </p:cTn>
+                              </p:par>
+                              <p:par>
+                                <p:cTn id="13" presetID="1" presetClass="entr" presetSubtype="0" fill="hold" nodeType="withEffect">
+                                  <p:stCondLst>
+                                    <p:cond delay="0"/>
+                                  </p:stCondLst>
+                                  <p:childTnLst>
+                                    <p:set>
+                                      <p:cBhvr>
+                                        <p:cTn id="14" dur="1" fill="hold">
+                                          <p:stCondLst>
+                                            <p:cond delay="0"/>
+                                          </p:stCondLst>
+                                        </p:cTn>
+                                        <p:tgtEl>
+                                          <p:spTgt spid="18"/>
+                                        </p:tgtEl>
+                                        <p:attrNameLst>
+                                          <p:attrName>style.visibility</p:attrName>
+                                        </p:attrNameLst>
+                                      </p:cBhvr>
+                                      <p:to>
+                                        <p:strVal val="visible"/>
+                                      </p:to>
+                                    </p:set>
+                                  </p:childTnLst>
+                                </p:cTn>
+                              </p:par>
+                            </p:childTnLst>
+                          </p:cTn>
+                        </p:par>
+                      </p:childTnLst>
+                    </p:cTn>
+                  </p:par>
+                  <p:par>
+                    <p:cTn id="15" fill="hold">
+                      <p:stCondLst>
+                        <p:cond delay="indefinite"/>
+                      </p:stCondLst>
+                      <p:childTnLst>
+                        <p:par>
+                          <p:cTn id="16" fill="hold">
+                            <p:stCondLst>
+                              <p:cond delay="0"/>
+                            </p:stCondLst>
+                            <p:childTnLst>
+                              <p:par>
+                                <p:cTn id="17" presetID="1" presetClass="entr" presetSubtype="0" fill="hold" grpId="0" nodeType="clickEffect">
+                                  <p:stCondLst>
+                                    <p:cond delay="0"/>
+                                  </p:stCondLst>
+                                  <p:childTnLst>
+                                    <p:set>
+                                      <p:cBhvr>
+                                        <p:cTn id="18" dur="1" fill="hold">
+                                          <p:stCondLst>
+                                            <p:cond delay="0"/>
+                                          </p:stCondLst>
+                                        </p:cTn>
+                                        <p:tgtEl>
+                                          <p:spTgt spid="29"/>
+                                        </p:tgtEl>
+                                        <p:attrNameLst>
+                                          <p:attrName>style.visibility</p:attrName>
+                                        </p:attrNameLst>
+                                      </p:cBhvr>
+                                      <p:to>
+                                        <p:strVal val="visible"/>
+                                      </p:to>
+                                    </p:set>
+                                  </p:childTnLst>
+                                </p:cTn>
+                              </p:par>
+                              <p:par>
+                                <p:cTn id="19" presetID="1" presetClass="entr" presetSubtype="0" fill="hold" nodeType="withEffect">
+                                  <p:stCondLst>
+                                    <p:cond delay="0"/>
+                                  </p:stCondLst>
+                                  <p:childTnLst>
+                                    <p:set>
+                                      <p:cBhvr>
+                                        <p:cTn id="20" dur="1" fill="hold">
+                                          <p:stCondLst>
+                                            <p:cond delay="0"/>
+                                          </p:stCondLst>
+                                        </p:cTn>
+                                        <p:tgtEl>
+                                          <p:spTgt spid="30"/>
+                                        </p:tgtEl>
+                                        <p:attrNameLst>
+                                          <p:attrName>style.visibility</p:attrName>
+                                        </p:attrNameLst>
+                                      </p:cBhvr>
+                                      <p:to>
+                                        <p:strVal val="visible"/>
+                                      </p:to>
+                                    </p:set>
+                                  </p:childTnLst>
+                                </p:cTn>
+                              </p:par>
+                            </p:childTnLst>
+                          </p:cTn>
+                        </p:par>
+                      </p:childTnLst>
+                    </p:cTn>
+                  </p:par>
+                </p:childTnLst>
+              </p:cTn>
+              <p:prevCondLst>
+                <p:cond evt="onPrev" delay="0">
+                  <p:tgtEl>
+                    <p:sldTgt/>
+                  </p:tgtEl>
+                </p:cond>
+              </p:prevCondLst>
+              <p:nextCondLst>
+                <p:cond evt="onNext" delay="0">
+                  <p:tgtEl>
+                    <p:sldTgt/>
+                  </p:tgtEl>
+                </p:cond>
+              </p:nextCondLst>
+            </p:seq>
+          </p:childTnLst>
+        </p:cTn>
+      </p:par>
+    </p:tnLst>
+    <p:bldLst>
+      <p:bldP spid="3" grpId="0"/>
+      <p:bldP spid="21" grpId="0"/>
+      <p:bldP spid="29" grpId="0"/>
+    </p:bldLst>
+  </p:timing>
 </p:sld>
 </file>
 
@@ -4687,7 +5033,7 @@
               <a:rPr lang="en-US" sz="2400" dirty="0">
                 <a:latin typeface="Helvetica" pitchFamily="2" charset="0"/>
               </a:rPr>
-              <a:t>want to mine genome-wide datasets to generate new hypotheses </a:t>
+              <a:t>want to mine genome-wide sequencing datasets to generate new hypotheses </a:t>
             </a:r>
           </a:p>
           <a:p>
@@ -4702,7 +5048,7 @@
               <a:rPr lang="en-US" sz="2400" dirty="0">
                 <a:latin typeface="Helvetica" pitchFamily="2" charset="0"/>
               </a:rPr>
-              <a:t>are curious about working with truly ‘</a:t>
+              <a:t>are curious about working with ‘</a:t>
             </a:r>
             <a:r>
               <a:rPr lang="en-US" sz="2400" i="1" dirty="0">
@@ -4739,7 +5085,7 @@
         </p:nvSpPr>
         <p:spPr>
           <a:xfrm>
-            <a:off x="1774334" y="4230680"/>
+            <a:off x="313280" y="4298287"/>
             <a:ext cx="8643322" cy="1298625"/>
           </a:xfrm>
           <a:prstGeom prst="rect">
@@ -4753,7 +5099,7 @@
           </a:bodyPr>
           <a:lstStyle/>
           <a:p>
-            <a:pPr algn="ctr">
+            <a:pPr>
               <a:lnSpc>
                 <a:spcPct val="150000"/>
               </a:lnSpc>
@@ -4766,7 +5112,7 @@
             </a:r>
           </a:p>
           <a:p>
-            <a:pPr marL="342900" indent="-342900" algn="ctr">
+            <a:pPr marL="342900" indent="-342900">
               <a:lnSpc>
                 <a:spcPct val="150000"/>
               </a:lnSpc>
@@ -4781,7 +5127,7 @@
             </a:r>
           </a:p>
           <a:p>
-            <a:pPr marL="342900" indent="-342900" algn="ctr">
+            <a:pPr marL="342900" indent="-342900">
               <a:lnSpc>
                 <a:spcPct val="150000"/>
               </a:lnSpc>
@@ -4913,6 +5259,84 @@
   <p:clrMapOvr>
     <a:masterClrMapping/>
   </p:clrMapOvr>
+  <p:timing>
+    <p:tnLst>
+      <p:par>
+        <p:cTn id="1" dur="indefinite" restart="never" nodeType="tmRoot">
+          <p:childTnLst>
+            <p:seq concurrent="1" nextAc="seek">
+              <p:cTn id="2" dur="indefinite" nodeType="mainSeq">
+                <p:childTnLst>
+                  <p:par>
+                    <p:cTn id="3" fill="hold">
+                      <p:stCondLst>
+                        <p:cond delay="indefinite"/>
+                      </p:stCondLst>
+                      <p:childTnLst>
+                        <p:par>
+                          <p:cTn id="4" fill="hold">
+                            <p:stCondLst>
+                              <p:cond delay="0"/>
+                            </p:stCondLst>
+                            <p:childTnLst>
+                              <p:par>
+                                <p:cTn id="5" presetID="1" presetClass="entr" presetSubtype="0" fill="hold" grpId="0" nodeType="clickEffect">
+                                  <p:stCondLst>
+                                    <p:cond delay="0"/>
+                                  </p:stCondLst>
+                                  <p:childTnLst>
+                                    <p:set>
+                                      <p:cBhvr>
+                                        <p:cTn id="6" dur="1" fill="hold">
+                                          <p:stCondLst>
+                                            <p:cond delay="0"/>
+                                          </p:stCondLst>
+                                        </p:cTn>
+                                        <p:tgtEl>
+                                          <p:spTgt spid="15"/>
+                                        </p:tgtEl>
+                                        <p:attrNameLst>
+                                          <p:attrName>style.visibility</p:attrName>
+                                        </p:attrNameLst>
+                                      </p:cBhvr>
+                                      <p:to>
+                                        <p:strVal val="visible"/>
+                                      </p:to>
+                                    </p:set>
+                                  </p:childTnLst>
+                                </p:cTn>
+                              </p:par>
+                            </p:childTnLst>
+                          </p:cTn>
+                        </p:par>
+                      </p:childTnLst>
+                    </p:cTn>
+                  </p:par>
+                </p:childTnLst>
+              </p:cTn>
+              <p:prevCondLst>
+                <p:cond evt="onPrev" delay="0">
+                  <p:tgtEl>
+                    <p:sldTgt/>
+                  </p:tgtEl>
+                </p:cond>
+              </p:prevCondLst>
+              <p:nextCondLst>
+                <p:cond evt="onNext" delay="0">
+                  <p:tgtEl>
+                    <p:sldTgt/>
+                  </p:tgtEl>
+                </p:cond>
+              </p:nextCondLst>
+            </p:seq>
+          </p:childTnLst>
+        </p:cTn>
+      </p:par>
+    </p:tnLst>
+    <p:bldLst>
+      <p:bldP spid="15" grpId="0"/>
+    </p:bldLst>
+  </p:timing>
 </p:sld>
 </file>
 
@@ -4924,7 +5348,7 @@
         <p:cNvPr id="1" name="">
           <a:extLst>
             <a:ext uri="{FF2B5EF4-FFF2-40B4-BE49-F238E27FC236}">
-              <a16:creationId xmlns:a16="http://schemas.microsoft.com/office/drawing/2014/main" id="{F0D03279-1F0F-E890-EF2D-70BCBC4F8272}"/>
+              <a16:creationId xmlns:a16="http://schemas.microsoft.com/office/drawing/2014/main" id="{52953345-AD1E-65C7-1B30-A0256F71FA5F}"/>
             </a:ext>
           </a:extLst>
         </p:cNvPr>
@@ -4941,169 +5365,10 @@
       </p:grpSpPr>
       <p:sp>
         <p:nvSpPr>
-          <p:cNvPr id="5" name="TextBox 4">
-            <a:extLst>
-              <a:ext uri="{FF2B5EF4-FFF2-40B4-BE49-F238E27FC236}">
-                <a16:creationId xmlns:a16="http://schemas.microsoft.com/office/drawing/2014/main" id="{95997BA2-F5F1-4419-B553-8A391376255C}"/>
-              </a:ext>
-            </a:extLst>
-          </p:cNvPr>
-          <p:cNvSpPr txBox="1"/>
-          <p:nvPr/>
-        </p:nvSpPr>
-        <p:spPr>
-          <a:xfrm>
-            <a:off x="190230" y="1426726"/>
-            <a:ext cx="6441923" cy="5355312"/>
-          </a:xfrm>
-          <a:prstGeom prst="rect">
-            <a:avLst/>
-          </a:prstGeom>
-          <a:noFill/>
-        </p:spPr>
-        <p:txBody>
-          <a:bodyPr wrap="square" rtlCol="0">
-            <a:spAutoFit/>
-          </a:bodyPr>
-          <a:lstStyle/>
-          <a:p>
-            <a:pPr>
-              <a:lnSpc>
-                <a:spcPct val="150000"/>
-              </a:lnSpc>
-            </a:pPr>
-            <a:r>
-              <a:rPr lang="en-US" dirty="0">
-                <a:latin typeface="Helvetica" pitchFamily="2" charset="0"/>
-              </a:rPr>
-              <a:t>In this submodule, you will learn how to…</a:t>
-            </a:r>
-          </a:p>
-          <a:p>
-            <a:pPr marL="285750" indent="-285750">
-              <a:lnSpc>
-                <a:spcPct val="150000"/>
-              </a:lnSpc>
-              <a:buFont typeface="Arial" panose="020B0604020202020204" pitchFamily="34" charset="0"/>
-              <a:buChar char="•"/>
-            </a:pPr>
-            <a:r>
-              <a:rPr lang="en-US" dirty="0">
-                <a:latin typeface="Helvetica" pitchFamily="2" charset="0"/>
-              </a:rPr>
-              <a:t>Work on a command-line interface</a:t>
-            </a:r>
-          </a:p>
-          <a:p>
-            <a:pPr marL="285750" indent="-285750">
-              <a:lnSpc>
-                <a:spcPct val="150000"/>
-              </a:lnSpc>
-              <a:buFont typeface="Arial" panose="020B0604020202020204" pitchFamily="34" charset="0"/>
-              <a:buChar char="•"/>
-            </a:pPr>
-            <a:r>
-              <a:rPr lang="en-US" dirty="0">
-                <a:latin typeface="Helvetica" pitchFamily="2" charset="0"/>
-              </a:rPr>
-              <a:t>Document &amp; share your work in a reproducible manner</a:t>
-            </a:r>
-          </a:p>
-          <a:p>
-            <a:pPr marL="285750" indent="-285750">
-              <a:lnSpc>
-                <a:spcPct val="150000"/>
-              </a:lnSpc>
-              <a:buFont typeface="Arial" panose="020B0604020202020204" pitchFamily="34" charset="0"/>
-              <a:buChar char="•"/>
-            </a:pPr>
-            <a:r>
-              <a:rPr lang="en-US" dirty="0">
-                <a:latin typeface="Helvetica" pitchFamily="2" charset="0"/>
-              </a:rPr>
-              <a:t>Perform RNA-seq analysis, both bulk and at single-cell resolution</a:t>
-            </a:r>
-          </a:p>
-          <a:p>
-            <a:pPr marL="285750" indent="-285750">
-              <a:lnSpc>
-                <a:spcPct val="150000"/>
-              </a:lnSpc>
-              <a:buFont typeface="Arial" panose="020B0604020202020204" pitchFamily="34" charset="0"/>
-              <a:buChar char="•"/>
-            </a:pPr>
-            <a:r>
-              <a:rPr lang="en-US" dirty="0">
-                <a:latin typeface="Helvetica" pitchFamily="2" charset="0"/>
-              </a:rPr>
-              <a:t>Assemble &amp; annotate a bacterial genome</a:t>
-            </a:r>
-          </a:p>
-          <a:p>
-            <a:pPr marL="285750" indent="-285750">
-              <a:lnSpc>
-                <a:spcPct val="150000"/>
-              </a:lnSpc>
-              <a:buFont typeface="Arial" panose="020B0604020202020204" pitchFamily="34" charset="0"/>
-              <a:buChar char="•"/>
-            </a:pPr>
-            <a:r>
-              <a:rPr lang="en-US" dirty="0">
-                <a:latin typeface="Helvetica" pitchFamily="2" charset="0"/>
-              </a:rPr>
-              <a:t>Infer gene-regulatory networks</a:t>
-            </a:r>
-          </a:p>
-          <a:p>
-            <a:pPr marL="285750" indent="-285750">
-              <a:lnSpc>
-                <a:spcPct val="150000"/>
-              </a:lnSpc>
-              <a:buFont typeface="Arial" panose="020B0604020202020204" pitchFamily="34" charset="0"/>
-              <a:buChar char="•"/>
-            </a:pPr>
-            <a:endParaRPr lang="en-US" dirty="0">
-              <a:latin typeface="Helvetica" pitchFamily="2" charset="0"/>
-            </a:endParaRPr>
-          </a:p>
-          <a:p>
-            <a:pPr marL="285750" indent="-285750">
-              <a:lnSpc>
-                <a:spcPct val="150000"/>
-              </a:lnSpc>
-              <a:buFont typeface="Arial" panose="020B0604020202020204" pitchFamily="34" charset="0"/>
-              <a:buChar char="•"/>
-            </a:pPr>
-            <a:endParaRPr lang="en-US" dirty="0">
-              <a:latin typeface="Helvetica" pitchFamily="2" charset="0"/>
-            </a:endParaRPr>
-          </a:p>
-          <a:p>
-            <a:pPr>
-              <a:lnSpc>
-                <a:spcPct val="150000"/>
-              </a:lnSpc>
-            </a:pPr>
-            <a:r>
-              <a:rPr lang="en-US" dirty="0">
-                <a:latin typeface="Helvetica" pitchFamily="2" charset="0"/>
-              </a:rPr>
-              <a:t>These skills are highly relevant and sought after in academic research and industry (drug development, plant breeding, conservation ecology)</a:t>
-            </a:r>
-          </a:p>
-          <a:p>
-            <a:endParaRPr lang="en-US" dirty="0">
-              <a:latin typeface="Helvetica" pitchFamily="2" charset="0"/>
-            </a:endParaRPr>
-          </a:p>
-        </p:txBody>
-      </p:sp>
-      <p:sp>
-        <p:nvSpPr>
           <p:cNvPr id="7" name="Rectangle 6">
             <a:extLst>
               <a:ext uri="{FF2B5EF4-FFF2-40B4-BE49-F238E27FC236}">
-                <a16:creationId xmlns:a16="http://schemas.microsoft.com/office/drawing/2014/main" id="{39110749-1727-8B89-48EE-5682336C392C}"/>
+                <a16:creationId xmlns:a16="http://schemas.microsoft.com/office/drawing/2014/main" id="{8AEC0BC5-6469-3DD9-AB2B-CDD0E9C78EFB}"/>
               </a:ext>
             </a:extLst>
           </p:cNvPr>
@@ -5153,10 +5418,10 @@
       </p:sp>
       <p:sp>
         <p:nvSpPr>
-          <p:cNvPr id="4" name="TextBox 3">
-            <a:extLst>
-              <a:ext uri="{FF2B5EF4-FFF2-40B4-BE49-F238E27FC236}">
-                <a16:creationId xmlns:a16="http://schemas.microsoft.com/office/drawing/2014/main" id="{E2319571-E3C9-552A-D540-04AE1169EF85}"/>
+          <p:cNvPr id="9" name="TextBox 8">
+            <a:extLst>
+              <a:ext uri="{FF2B5EF4-FFF2-40B4-BE49-F238E27FC236}">
+                <a16:creationId xmlns:a16="http://schemas.microsoft.com/office/drawing/2014/main" id="{BEE5656F-E5CB-B337-8EE8-78DAFD13B935}"/>
               </a:ext>
             </a:extLst>
           </p:cNvPr>
@@ -5166,7 +5431,7 @@
         <p:spPr>
           <a:xfrm>
             <a:off x="190231" y="113378"/>
-            <a:ext cx="8241359" cy="584775"/>
+            <a:ext cx="6632970" cy="584775"/>
           </a:xfrm>
           <a:prstGeom prst="rect">
             <a:avLst/>
@@ -5186,17 +5451,184 @@
                 </a:solidFill>
                 <a:latin typeface="Helvetica" pitchFamily="2" charset="0"/>
               </a:rPr>
-              <a:t>What you will learn and do in this module</a:t>
-            </a:r>
-          </a:p>
-        </p:txBody>
-      </p:sp>
-      <p:sp>
-        <p:nvSpPr>
-          <p:cNvPr id="3" name="TextBox 2">
-            <a:extLst>
-              <a:ext uri="{FF2B5EF4-FFF2-40B4-BE49-F238E27FC236}">
-                <a16:creationId xmlns:a16="http://schemas.microsoft.com/office/drawing/2014/main" id="{455095BD-B2C4-060E-DC5F-25D3AE61DCB5}"/>
+              <a:t>MDA is a good fit for you if you…</a:t>
+            </a:r>
+          </a:p>
+        </p:txBody>
+      </p:sp>
+      <p:sp>
+        <p:nvSpPr>
+          <p:cNvPr id="14" name="TextBox 13">
+            <a:extLst>
+              <a:ext uri="{FF2B5EF4-FFF2-40B4-BE49-F238E27FC236}">
+                <a16:creationId xmlns:a16="http://schemas.microsoft.com/office/drawing/2014/main" id="{AF672C8A-82B5-5E5C-5800-DCBB2E469274}"/>
+              </a:ext>
+            </a:extLst>
+          </p:cNvPr>
+          <p:cNvSpPr txBox="1"/>
+          <p:nvPr/>
+        </p:nvSpPr>
+        <p:spPr>
+          <a:xfrm>
+            <a:off x="313280" y="1414456"/>
+            <a:ext cx="11565430" cy="2254720"/>
+          </a:xfrm>
+          <a:prstGeom prst="rect">
+            <a:avLst/>
+          </a:prstGeom>
+          <a:noFill/>
+        </p:spPr>
+        <p:txBody>
+          <a:bodyPr wrap="square" rtlCol="0">
+            <a:spAutoFit/>
+          </a:bodyPr>
+          <a:lstStyle/>
+          <a:p>
+            <a:pPr marL="342900" indent="-342900">
+              <a:lnSpc>
+                <a:spcPct val="150000"/>
+              </a:lnSpc>
+              <a:buFont typeface="Arial" panose="020B0604020202020204" pitchFamily="34" charset="0"/>
+              <a:buChar char="•"/>
+            </a:pPr>
+            <a:r>
+              <a:rPr lang="en-US" sz="2400" dirty="0">
+                <a:latin typeface="Helvetica" pitchFamily="2" charset="0"/>
+              </a:rPr>
+              <a:t>want to understand the molecular mechanisms that underly the diversity of form and function of organisms</a:t>
+            </a:r>
+          </a:p>
+          <a:p>
+            <a:pPr marL="342900" indent="-342900">
+              <a:lnSpc>
+                <a:spcPct val="150000"/>
+              </a:lnSpc>
+              <a:buFont typeface="Arial" panose="020B0604020202020204" pitchFamily="34" charset="0"/>
+              <a:buChar char="•"/>
+            </a:pPr>
+            <a:r>
+              <a:rPr lang="en-US" sz="2400" dirty="0">
+                <a:latin typeface="Helvetica" pitchFamily="2" charset="0"/>
+              </a:rPr>
+              <a:t>want to mine genome-wide sequencing datasets to generate new hypotheses </a:t>
+            </a:r>
+          </a:p>
+          <a:p>
+            <a:pPr marL="342900" indent="-342900">
+              <a:lnSpc>
+                <a:spcPct val="150000"/>
+              </a:lnSpc>
+              <a:buFont typeface="Arial" panose="020B0604020202020204" pitchFamily="34" charset="0"/>
+              <a:buChar char="•"/>
+            </a:pPr>
+            <a:r>
+              <a:rPr lang="en-US" sz="2400" dirty="0">
+                <a:latin typeface="Helvetica" pitchFamily="2" charset="0"/>
+              </a:rPr>
+              <a:t>are curious about working with ‘</a:t>
+            </a:r>
+            <a:r>
+              <a:rPr lang="en-US" sz="2400" i="1" dirty="0">
+                <a:latin typeface="Helvetica" pitchFamily="2" charset="0"/>
+              </a:rPr>
+              <a:t>big data’ </a:t>
+            </a:r>
+            <a:r>
+              <a:rPr lang="en-US" sz="2400" dirty="0">
+                <a:latin typeface="Helvetica" pitchFamily="2" charset="0"/>
+              </a:rPr>
+              <a:t>datasets </a:t>
+            </a:r>
+            <a:endParaRPr lang="en-US" sz="2400" dirty="0">
+              <a:solidFill>
+                <a:srgbClr val="000000"/>
+              </a:solidFill>
+              <a:latin typeface="Helvetica" pitchFamily="2" charset="0"/>
+            </a:endParaRPr>
+          </a:p>
+        </p:txBody>
+      </p:sp>
+      <p:sp>
+        <p:nvSpPr>
+          <p:cNvPr id="15" name="TextBox 14">
+            <a:extLst>
+              <a:ext uri="{FF2B5EF4-FFF2-40B4-BE49-F238E27FC236}">
+                <a16:creationId xmlns:a16="http://schemas.microsoft.com/office/drawing/2014/main" id="{12F8EC28-1C08-008D-D5CE-DF9D66070EBD}"/>
+              </a:ext>
+            </a:extLst>
+          </p:cNvPr>
+          <p:cNvSpPr txBox="1"/>
+          <p:nvPr/>
+        </p:nvSpPr>
+        <p:spPr>
+          <a:xfrm>
+            <a:off x="313280" y="4298287"/>
+            <a:ext cx="8643322" cy="1298625"/>
+          </a:xfrm>
+          <a:prstGeom prst="rect">
+            <a:avLst/>
+          </a:prstGeom>
+          <a:noFill/>
+        </p:spPr>
+        <p:txBody>
+          <a:bodyPr wrap="square" rtlCol="0">
+            <a:spAutoFit/>
+          </a:bodyPr>
+          <a:lstStyle/>
+          <a:p>
+            <a:pPr>
+              <a:lnSpc>
+                <a:spcPct val="150000"/>
+              </a:lnSpc>
+            </a:pPr>
+            <a:r>
+              <a:rPr lang="en-US" b="1" i="1" dirty="0">
+                <a:latin typeface="Helvetica" pitchFamily="2" charset="0"/>
+              </a:rPr>
+              <a:t>Pre-requisites: </a:t>
+            </a:r>
+          </a:p>
+          <a:p>
+            <a:pPr marL="342900" indent="-342900">
+              <a:lnSpc>
+                <a:spcPct val="150000"/>
+              </a:lnSpc>
+              <a:buFontTx/>
+              <a:buChar char="-"/>
+            </a:pPr>
+            <a:r>
+              <a:rPr lang="en-US" i="1" dirty="0">
+                <a:latin typeface="Helvetica" pitchFamily="2" charset="0"/>
+              </a:rPr>
+              <a:t>some experience with programming in R</a:t>
+            </a:r>
+          </a:p>
+          <a:p>
+            <a:pPr marL="342900" indent="-342900">
+              <a:lnSpc>
+                <a:spcPct val="150000"/>
+              </a:lnSpc>
+              <a:buFontTx/>
+              <a:buChar char="-"/>
+            </a:pPr>
+            <a:r>
+              <a:rPr lang="en-US" i="1" dirty="0">
+                <a:solidFill>
+                  <a:srgbClr val="000000"/>
+                </a:solidFill>
+                <a:latin typeface="Helvetica" pitchFamily="2" charset="0"/>
+              </a:rPr>
+              <a:t>familiar with basic concepts in molecular biology &amp; genetics</a:t>
+            </a:r>
+          </a:p>
+        </p:txBody>
+      </p:sp>
+      <p:sp>
+        <p:nvSpPr>
+          <p:cNvPr id="2" name="TextBox 1">
+            <a:extLst>
+              <a:ext uri="{FF2B5EF4-FFF2-40B4-BE49-F238E27FC236}">
+                <a16:creationId xmlns:a16="http://schemas.microsoft.com/office/drawing/2014/main" id="{B421064D-5A6E-6D5D-0F4D-3A6A9D880F6A}"/>
               </a:ext>
             </a:extLst>
           </p:cNvPr>
@@ -5235,7 +5667,7 @@
             <a:r>
               <a:rPr lang="en-US" sz="1700" i="1" dirty="0">
                 <a:latin typeface="Helvetica" pitchFamily="2" charset="0"/>
-                <a:hlinkClick r:id="rId3"/>
+                <a:hlinkClick r:id="rId2"/>
               </a:rPr>
               <a:t>m.m.paauw@uva.nl</a:t>
             </a:r>
@@ -5275,7 +5707,7 @@
                   </a:schemeClr>
                 </a:solidFill>
                 <a:latin typeface="Helvetica" pitchFamily="2" charset="0"/>
-                <a:hlinkClick r:id="rId4"/>
+                <a:hlinkClick r:id="rId3"/>
               </a:rPr>
               <a:t>p.m.bleeker@uva.nl</a:t>
             </a:r>
@@ -5296,44 +5728,141 @@
       </p:sp>
       <p:pic>
         <p:nvPicPr>
-          <p:cNvPr id="10" name="Picture 9">
-            <a:extLst>
-              <a:ext uri="{FF2B5EF4-FFF2-40B4-BE49-F238E27FC236}">
-                <a16:creationId xmlns:a16="http://schemas.microsoft.com/office/drawing/2014/main" id="{B5C77762-172A-5413-3A56-55CB0406FD18}"/>
+          <p:cNvPr id="3" name="Picture 2">
+            <a:extLst>
+              <a:ext uri="{FF2B5EF4-FFF2-40B4-BE49-F238E27FC236}">
+                <a16:creationId xmlns:a16="http://schemas.microsoft.com/office/drawing/2014/main" id="{324A574A-B830-2212-B7AB-53D3794D83B3}"/>
               </a:ext>
             </a:extLst>
           </p:cNvPr>
           <p:cNvPicPr>
-            <a:picLocks noChangeAspect="1"/>
+            <a:picLocks noChangeAspect="1" noChangeArrowheads="1"/>
           </p:cNvPicPr>
           <p:nvPr/>
         </p:nvPicPr>
         <p:blipFill>
-          <a:blip r:embed="rId5"/>
+          <a:blip r:embed="rId4">
+            <a:extLst>
+              <a:ext uri="{28A0092B-C50C-407E-A947-70E740481C1C}">
+                <a14:useLocalDpi xmlns:a14="http://schemas.microsoft.com/office/drawing/2010/main" val="0"/>
+              </a:ext>
+            </a:extLst>
+          </a:blip>
           <a:stretch>
             <a:fillRect/>
           </a:stretch>
         </p:blipFill>
-        <p:spPr>
+        <p:spPr bwMode="auto">
           <a:xfrm>
-            <a:off x="6801095" y="1734812"/>
-            <a:ext cx="4535276" cy="2551093"/>
+            <a:off x="6823201" y="1269144"/>
+            <a:ext cx="5065434" cy="4698189"/>
           </a:xfrm>
           <a:prstGeom prst="rect">
             <a:avLst/>
           </a:prstGeom>
+          <a:noFill/>
+          <a:ln>
+            <a:noFill/>
+          </a:ln>
+          <a:extLst>
+            <a:ext uri="{909E8E84-426E-40DD-AFC4-6F175D3DCCD1}">
+              <a14:hiddenFill xmlns:a14="http://schemas.microsoft.com/office/drawing/2010/main">
+                <a:solidFill>
+                  <a:srgbClr val="FFFFFF"/>
+                </a:solidFill>
+              </a14:hiddenFill>
+            </a:ext>
+          </a:extLst>
         </p:spPr>
       </p:pic>
     </p:spTree>
     <p:extLst>
       <p:ext uri="{BB962C8B-B14F-4D97-AF65-F5344CB8AC3E}">
-        <p14:creationId xmlns:p14="http://schemas.microsoft.com/office/powerpoint/2010/main" val="1237806661"/>
+        <p14:creationId xmlns:p14="http://schemas.microsoft.com/office/powerpoint/2010/main" val="3335131516"/>
       </p:ext>
     </p:extLst>
   </p:cSld>
   <p:clrMapOvr>
     <a:masterClrMapping/>
   </p:clrMapOvr>
+  <p:timing>
+    <p:tnLst>
+      <p:par>
+        <p:cTn id="1" dur="indefinite" restart="never" nodeType="tmRoot">
+          <p:childTnLst>
+            <p:seq concurrent="1" nextAc="seek">
+              <p:cTn id="2" dur="indefinite" nodeType="mainSeq">
+                <p:childTnLst>
+                  <p:par>
+                    <p:cTn id="3" fill="hold">
+                      <p:stCondLst>
+                        <p:cond delay="indefinite"/>
+                      </p:stCondLst>
+                      <p:childTnLst>
+                        <p:par>
+                          <p:cTn id="4" fill="hold">
+                            <p:stCondLst>
+                              <p:cond delay="0"/>
+                            </p:stCondLst>
+                            <p:childTnLst>
+                              <p:par>
+                                <p:cTn id="5" presetID="1" presetClass="entr" presetSubtype="0" fill="hold" grpId="0" nodeType="clickEffect">
+                                  <p:stCondLst>
+                                    <p:cond delay="0"/>
+                                  </p:stCondLst>
+                                  <p:childTnLst>
+                                    <p:set>
+                                      <p:cBhvr>
+                                        <p:cTn id="6" dur="1" fill="hold">
+                                          <p:stCondLst>
+                                            <p:cond delay="0"/>
+                                          </p:stCondLst>
+                                        </p:cTn>
+                                        <p:tgtEl>
+                                          <p:spTgt spid="15"/>
+                                        </p:tgtEl>
+                                        <p:attrNameLst>
+                                          <p:attrName>style.visibility</p:attrName>
+                                        </p:attrNameLst>
+                                      </p:cBhvr>
+                                      <p:to>
+                                        <p:strVal val="visible"/>
+                                      </p:to>
+                                    </p:set>
+                                  </p:childTnLst>
+                                </p:cTn>
+                              </p:par>
+                            </p:childTnLst>
+                          </p:cTn>
+                        </p:par>
+                      </p:childTnLst>
+                    </p:cTn>
+                  </p:par>
+                </p:childTnLst>
+              </p:cTn>
+              <p:prevCondLst>
+                <p:cond evt="onPrev" delay="0">
+                  <p:tgtEl>
+                    <p:sldTgt/>
+                  </p:tgtEl>
+                </p:cond>
+              </p:prevCondLst>
+              <p:nextCondLst>
+                <p:cond evt="onNext" delay="0">
+                  <p:tgtEl>
+                    <p:sldTgt/>
+                  </p:tgtEl>
+                </p:cond>
+              </p:nextCondLst>
+            </p:seq>
+          </p:childTnLst>
+        </p:cTn>
+      </p:par>
+    </p:tnLst>
+    <p:bldLst>
+      <p:bldP spid="15" grpId="0"/>
+    </p:bldLst>
+  </p:timing>
 </p:sld>
 </file>
 
@@ -5342,7 +5871,13 @@
   <p:cSld>
     <p:spTree>
       <p:nvGrpSpPr>
-        <p:cNvPr id="1" name=""/>
+        <p:cNvPr id="1" name="">
+          <a:extLst>
+            <a:ext uri="{FF2B5EF4-FFF2-40B4-BE49-F238E27FC236}">
+              <a16:creationId xmlns:a16="http://schemas.microsoft.com/office/drawing/2014/main" id="{F0D03279-1F0F-E890-EF2D-70BCBC4F8272}"/>
+            </a:ext>
+          </a:extLst>
+        </p:cNvPr>
         <p:cNvGrpSpPr/>
         <p:nvPr/>
       </p:nvGrpSpPr>
@@ -5356,10 +5891,10 @@
       </p:grpSpPr>
       <p:sp>
         <p:nvSpPr>
-          <p:cNvPr id="6" name="TextBox 5">
-            <a:extLst>
-              <a:ext uri="{FF2B5EF4-FFF2-40B4-BE49-F238E27FC236}">
-                <a16:creationId xmlns:a16="http://schemas.microsoft.com/office/drawing/2014/main" id="{D29251DE-E46B-0433-0B59-5BF14EEC2A58}"/>
+          <p:cNvPr id="5" name="TextBox 4">
+            <a:extLst>
+              <a:ext uri="{FF2B5EF4-FFF2-40B4-BE49-F238E27FC236}">
+                <a16:creationId xmlns:a16="http://schemas.microsoft.com/office/drawing/2014/main" id="{95997BA2-F5F1-4419-B553-8A391376255C}"/>
               </a:ext>
             </a:extLst>
           </p:cNvPr>
@@ -5368,8 +5903,8 @@
         </p:nvSpPr>
         <p:spPr>
           <a:xfrm>
-            <a:off x="6244361" y="1131600"/>
-            <a:ext cx="5404236" cy="2129686"/>
+            <a:off x="60007" y="1486264"/>
+            <a:ext cx="6959717" cy="5355312"/>
           </a:xfrm>
           <a:prstGeom prst="rect">
             <a:avLst/>
@@ -5377,7 +5912,7 @@
           <a:noFill/>
         </p:spPr>
         <p:txBody>
-          <a:bodyPr wrap="none" rtlCol="0">
+          <a:bodyPr wrap="square" rtlCol="0">
             <a:spAutoFit/>
           </a:bodyPr>
           <a:lstStyle/>
@@ -5388,185 +5923,10 @@
               </a:lnSpc>
             </a:pPr>
             <a:r>
-              <a:rPr lang="en-US" b="1" dirty="0">
-                <a:latin typeface="Helvetica" pitchFamily="2" charset="0"/>
-              </a:rPr>
-              <a:t>Teachers: </a:t>
-            </a:r>
-          </a:p>
-          <a:p>
-            <a:pPr>
-              <a:lnSpc>
-                <a:spcPct val="150000"/>
-              </a:lnSpc>
-            </a:pPr>
-            <a:r>
               <a:rPr lang="en-US" dirty="0">
                 <a:latin typeface="Helvetica" pitchFamily="2" charset="0"/>
               </a:rPr>
-              <a:t>Misha Paauw (Plant Physiology, SILS)</a:t>
-            </a:r>
-          </a:p>
-          <a:p>
-            <a:pPr>
-              <a:lnSpc>
-                <a:spcPct val="150000"/>
-              </a:lnSpc>
-            </a:pPr>
-            <a:r>
-              <a:rPr lang="en-US" dirty="0">
-                <a:latin typeface="Helvetica" pitchFamily="2" charset="0"/>
-              </a:rPr>
-              <a:t>Tijs Bliek (Plant Development &amp; Genetics. SILS)</a:t>
-            </a:r>
-          </a:p>
-          <a:p>
-            <a:pPr>
-              <a:lnSpc>
-                <a:spcPct val="150000"/>
-              </a:lnSpc>
-            </a:pPr>
-            <a:r>
-              <a:rPr lang="en-US" dirty="0">
-                <a:latin typeface="Helvetica" pitchFamily="2" charset="0"/>
-              </a:rPr>
-              <a:t>Aalt-Jan van Dijk (Biosystems Data Analysis, SILS)</a:t>
-            </a:r>
-          </a:p>
-          <a:p>
-            <a:pPr>
-              <a:lnSpc>
-                <a:spcPct val="150000"/>
-              </a:lnSpc>
-            </a:pPr>
-            <a:r>
-              <a:rPr lang="en-US" dirty="0">
-                <a:latin typeface="Helvetica" pitchFamily="2" charset="0"/>
-              </a:rPr>
-              <a:t>Kyran Wissink (Biosystems Data Analysis, SILS)</a:t>
-            </a:r>
-          </a:p>
-        </p:txBody>
-      </p:sp>
-      <p:sp>
-        <p:nvSpPr>
-          <p:cNvPr id="8" name="TextBox 7">
-            <a:extLst>
-              <a:ext uri="{FF2B5EF4-FFF2-40B4-BE49-F238E27FC236}">
-                <a16:creationId xmlns:a16="http://schemas.microsoft.com/office/drawing/2014/main" id="{AE42D9FB-2D59-87C9-CE81-E070566A0578}"/>
-              </a:ext>
-            </a:extLst>
-          </p:cNvPr>
-          <p:cNvSpPr txBox="1"/>
-          <p:nvPr/>
-        </p:nvSpPr>
-        <p:spPr>
-          <a:xfrm>
-            <a:off x="543403" y="1214768"/>
-            <a:ext cx="5036507" cy="1714187"/>
-          </a:xfrm>
-          <a:prstGeom prst="rect">
-            <a:avLst/>
-          </a:prstGeom>
-          <a:noFill/>
-        </p:spPr>
-        <p:txBody>
-          <a:bodyPr wrap="none" rtlCol="0">
-            <a:spAutoFit/>
-          </a:bodyPr>
-          <a:lstStyle/>
-          <a:p>
-            <a:pPr>
-              <a:lnSpc>
-                <a:spcPct val="150000"/>
-              </a:lnSpc>
-            </a:pPr>
-            <a:r>
-              <a:rPr lang="en-US" b="1" dirty="0">
-                <a:latin typeface="Helvetica" pitchFamily="2" charset="0"/>
-              </a:rPr>
-              <a:t>Teaching activities (% of total workload):</a:t>
-            </a:r>
-          </a:p>
-          <a:p>
-            <a:pPr>
-              <a:lnSpc>
-                <a:spcPct val="150000"/>
-              </a:lnSpc>
-            </a:pPr>
-            <a:r>
-              <a:rPr lang="en-US" dirty="0">
-                <a:latin typeface="Helvetica" pitchFamily="2" charset="0"/>
-              </a:rPr>
-              <a:t>Lectures 25%</a:t>
-            </a:r>
-          </a:p>
-          <a:p>
-            <a:pPr>
-              <a:lnSpc>
-                <a:spcPct val="150000"/>
-              </a:lnSpc>
-            </a:pPr>
-            <a:r>
-              <a:rPr lang="en-US" dirty="0">
-                <a:latin typeface="Helvetica" pitchFamily="2" charset="0"/>
-              </a:rPr>
-              <a:t>Tutorials (live-coding computer practicals): 50%</a:t>
-            </a:r>
-          </a:p>
-          <a:p>
-            <a:pPr>
-              <a:lnSpc>
-                <a:spcPct val="150000"/>
-              </a:lnSpc>
-            </a:pPr>
-            <a:r>
-              <a:rPr lang="en-US" dirty="0">
-                <a:latin typeface="Helvetica" pitchFamily="2" charset="0"/>
-              </a:rPr>
-              <a:t>Assignment: 25%</a:t>
-            </a:r>
-          </a:p>
-        </p:txBody>
-      </p:sp>
-      <p:sp>
-        <p:nvSpPr>
-          <p:cNvPr id="9" name="TextBox 8">
-            <a:extLst>
-              <a:ext uri="{FF2B5EF4-FFF2-40B4-BE49-F238E27FC236}">
-                <a16:creationId xmlns:a16="http://schemas.microsoft.com/office/drawing/2014/main" id="{DA69392B-6AAB-5AFB-DD6D-14BB9648FBF5}"/>
-              </a:ext>
-            </a:extLst>
-          </p:cNvPr>
-          <p:cNvSpPr txBox="1"/>
-          <p:nvPr/>
-        </p:nvSpPr>
-        <p:spPr>
-          <a:xfrm>
-            <a:off x="543403" y="3153573"/>
-            <a:ext cx="1960793" cy="883190"/>
-          </a:xfrm>
-          <a:prstGeom prst="rect">
-            <a:avLst/>
-          </a:prstGeom>
-          <a:noFill/>
-        </p:spPr>
-        <p:txBody>
-          <a:bodyPr wrap="none" rtlCol="0">
-            <a:spAutoFit/>
-          </a:bodyPr>
-          <a:lstStyle/>
-          <a:p>
-            <a:pPr>
-              <a:lnSpc>
-                <a:spcPct val="150000"/>
-              </a:lnSpc>
-            </a:pPr>
-            <a:r>
-              <a:rPr lang="en-US" b="1" dirty="0">
-                <a:latin typeface="Helvetica" pitchFamily="2" charset="0"/>
-              </a:rPr>
-              <a:t>Assessment:</a:t>
+              <a:t>In this submodule, you will learn how to…</a:t>
             </a:r>
           </a:p>
           <a:p>
@@ -5581,17 +5941,120 @@
               <a:rPr lang="en-US" dirty="0">
                 <a:latin typeface="Helvetica" pitchFamily="2" charset="0"/>
               </a:rPr>
-              <a:t>2x assignment</a:t>
-            </a:r>
-          </a:p>
-        </p:txBody>
-      </p:sp>
-      <p:sp>
-        <p:nvSpPr>
-          <p:cNvPr id="11" name="Rectangle 10">
-            <a:extLst>
-              <a:ext uri="{FF2B5EF4-FFF2-40B4-BE49-F238E27FC236}">
-                <a16:creationId xmlns:a16="http://schemas.microsoft.com/office/drawing/2014/main" id="{0C3719E3-A412-3D77-EEAA-4A14FADE334D}"/>
+              <a:t>Work on a command-line interface, starting from 0</a:t>
+            </a:r>
+          </a:p>
+          <a:p>
+            <a:pPr marL="285750" indent="-285750">
+              <a:lnSpc>
+                <a:spcPct val="150000"/>
+              </a:lnSpc>
+              <a:buFont typeface="Arial" panose="020B0604020202020204" pitchFamily="34" charset="0"/>
+              <a:buChar char="•"/>
+            </a:pPr>
+            <a:r>
+              <a:rPr lang="en-US" dirty="0">
+                <a:latin typeface="Helvetica" pitchFamily="2" charset="0"/>
+              </a:rPr>
+              <a:t>Document &amp; share your work in a reproducible manner (GitHub)</a:t>
+            </a:r>
+          </a:p>
+          <a:p>
+            <a:pPr marL="285750" indent="-285750">
+              <a:lnSpc>
+                <a:spcPct val="150000"/>
+              </a:lnSpc>
+              <a:buFont typeface="Arial" panose="020B0604020202020204" pitchFamily="34" charset="0"/>
+              <a:buChar char="•"/>
+            </a:pPr>
+            <a:r>
+              <a:rPr lang="en-US" dirty="0">
+                <a:latin typeface="Helvetica" pitchFamily="2" charset="0"/>
+              </a:rPr>
+              <a:t>Process sequencing data:</a:t>
+            </a:r>
+          </a:p>
+          <a:p>
+            <a:pPr marL="742950" lvl="1" indent="-285750">
+              <a:lnSpc>
+                <a:spcPct val="150000"/>
+              </a:lnSpc>
+              <a:buFont typeface="Arial" panose="020B0604020202020204" pitchFamily="34" charset="0"/>
+              <a:buChar char="•"/>
+            </a:pPr>
+            <a:r>
+              <a:rPr lang="en-US" dirty="0">
+                <a:latin typeface="Helvetica" pitchFamily="2" charset="0"/>
+              </a:rPr>
+              <a:t>Assemble &amp; annotate a bacterial genome</a:t>
+            </a:r>
+          </a:p>
+          <a:p>
+            <a:pPr marL="742950" lvl="1" indent="-285750">
+              <a:lnSpc>
+                <a:spcPct val="150000"/>
+              </a:lnSpc>
+              <a:buFont typeface="Arial" panose="020B0604020202020204" pitchFamily="34" charset="0"/>
+              <a:buChar char="•"/>
+            </a:pPr>
+            <a:r>
+              <a:rPr lang="en-US" dirty="0">
+                <a:latin typeface="Helvetica" pitchFamily="2" charset="0"/>
+              </a:rPr>
+              <a:t>Perform RNA-seq analysis, both bulk and at single-cell resolution</a:t>
+            </a:r>
+          </a:p>
+          <a:p>
+            <a:pPr marL="742950" lvl="1" indent="-285750">
+              <a:lnSpc>
+                <a:spcPct val="150000"/>
+              </a:lnSpc>
+              <a:buFont typeface="Arial" panose="020B0604020202020204" pitchFamily="34" charset="0"/>
+              <a:buChar char="•"/>
+            </a:pPr>
+            <a:r>
+              <a:rPr lang="en-US" dirty="0">
+                <a:latin typeface="Helvetica" pitchFamily="2" charset="0"/>
+              </a:rPr>
+              <a:t>Infer gene-regulatory networks</a:t>
+            </a:r>
+          </a:p>
+          <a:p>
+            <a:pPr>
+              <a:lnSpc>
+                <a:spcPct val="150000"/>
+              </a:lnSpc>
+            </a:pPr>
+            <a:endParaRPr lang="en-US" dirty="0">
+              <a:latin typeface="Helvetica" pitchFamily="2" charset="0"/>
+            </a:endParaRPr>
+          </a:p>
+          <a:p>
+            <a:pPr>
+              <a:lnSpc>
+                <a:spcPct val="150000"/>
+              </a:lnSpc>
+            </a:pPr>
+            <a:r>
+              <a:rPr lang="en-US" dirty="0">
+                <a:latin typeface="Helvetica" pitchFamily="2" charset="0"/>
+              </a:rPr>
+              <a:t>These skills are highly relevant and sought after in academic research and industry (drug development, plant breeding, conservation ecology).</a:t>
+            </a:r>
+          </a:p>
+          <a:p>
+            <a:endParaRPr lang="en-US" dirty="0">
+              <a:latin typeface="Helvetica" pitchFamily="2" charset="0"/>
+            </a:endParaRPr>
+          </a:p>
+        </p:txBody>
+      </p:sp>
+      <p:sp>
+        <p:nvSpPr>
+          <p:cNvPr id="7" name="Rectangle 6">
+            <a:extLst>
+              <a:ext uri="{FF2B5EF4-FFF2-40B4-BE49-F238E27FC236}">
+                <a16:creationId xmlns:a16="http://schemas.microsoft.com/office/drawing/2014/main" id="{39110749-1727-8B89-48EE-5682336C392C}"/>
               </a:ext>
             </a:extLst>
           </p:cNvPr>
@@ -5641,6 +6104,727 @@
       </p:sp>
       <p:sp>
         <p:nvSpPr>
+          <p:cNvPr id="4" name="TextBox 3">
+            <a:extLst>
+              <a:ext uri="{FF2B5EF4-FFF2-40B4-BE49-F238E27FC236}">
+                <a16:creationId xmlns:a16="http://schemas.microsoft.com/office/drawing/2014/main" id="{E2319571-E3C9-552A-D540-04AE1169EF85}"/>
+              </a:ext>
+            </a:extLst>
+          </p:cNvPr>
+          <p:cNvSpPr txBox="1"/>
+          <p:nvPr/>
+        </p:nvSpPr>
+        <p:spPr>
+          <a:xfrm>
+            <a:off x="190231" y="113378"/>
+            <a:ext cx="8241359" cy="584775"/>
+          </a:xfrm>
+          <a:prstGeom prst="rect">
+            <a:avLst/>
+          </a:prstGeom>
+          <a:noFill/>
+        </p:spPr>
+        <p:txBody>
+          <a:bodyPr wrap="none" rtlCol="0">
+            <a:spAutoFit/>
+          </a:bodyPr>
+          <a:lstStyle/>
+          <a:p>
+            <a:r>
+              <a:rPr lang="en-US" sz="3200" b="1" dirty="0">
+                <a:solidFill>
+                  <a:schemeClr val="bg1"/>
+                </a:solidFill>
+                <a:latin typeface="Helvetica" pitchFamily="2" charset="0"/>
+              </a:rPr>
+              <a:t>What you will learn and do in this module</a:t>
+            </a:r>
+          </a:p>
+        </p:txBody>
+      </p:sp>
+      <p:sp>
+        <p:nvSpPr>
+          <p:cNvPr id="3" name="TextBox 2">
+            <a:extLst>
+              <a:ext uri="{FF2B5EF4-FFF2-40B4-BE49-F238E27FC236}">
+                <a16:creationId xmlns:a16="http://schemas.microsoft.com/office/drawing/2014/main" id="{455095BD-B2C4-060E-DC5F-25D3AE61DCB5}"/>
+              </a:ext>
+            </a:extLst>
+          </p:cNvPr>
+          <p:cNvSpPr txBox="1"/>
+          <p:nvPr/>
+        </p:nvSpPr>
+        <p:spPr>
+          <a:xfrm>
+            <a:off x="7234498" y="6226023"/>
+            <a:ext cx="4897495" cy="615553"/>
+          </a:xfrm>
+          <a:prstGeom prst="rect">
+            <a:avLst/>
+          </a:prstGeom>
+          <a:noFill/>
+        </p:spPr>
+        <p:txBody>
+          <a:bodyPr wrap="none" rtlCol="0">
+            <a:spAutoFit/>
+          </a:bodyPr>
+          <a:lstStyle/>
+          <a:p>
+            <a:pPr algn="r"/>
+            <a:r>
+              <a:rPr lang="en-US" sz="1700" i="1" dirty="0">
+                <a:solidFill>
+                  <a:schemeClr val="tx1">
+                    <a:lumMod val="50000"/>
+                    <a:lumOff val="50000"/>
+                  </a:schemeClr>
+                </a:solidFill>
+                <a:latin typeface="Helvetica" pitchFamily="2" charset="0"/>
+              </a:rPr>
+              <a:t>Coordinator: Misha Paauw (</a:t>
+            </a:r>
+            <a:r>
+              <a:rPr lang="en-US" sz="1700" i="1" dirty="0">
+                <a:latin typeface="Helvetica" pitchFamily="2" charset="0"/>
+                <a:hlinkClick r:id="rId3"/>
+              </a:rPr>
+              <a:t>m.m.paauw@uva.nl</a:t>
+            </a:r>
+            <a:r>
+              <a:rPr lang="en-US" sz="1700" i="1" dirty="0">
+                <a:solidFill>
+                  <a:schemeClr val="tx1">
+                    <a:lumMod val="50000"/>
+                    <a:lumOff val="50000"/>
+                  </a:schemeClr>
+                </a:solidFill>
+                <a:latin typeface="Helvetica" pitchFamily="2" charset="0"/>
+              </a:rPr>
+              <a:t>)</a:t>
+            </a:r>
+          </a:p>
+          <a:p>
+            <a:pPr algn="r"/>
+            <a:r>
+              <a:rPr lang="en-US" sz="1700" i="1" dirty="0">
+                <a:solidFill>
+                  <a:schemeClr val="tx1">
+                    <a:lumMod val="50000"/>
+                    <a:lumOff val="50000"/>
+                  </a:schemeClr>
+                </a:solidFill>
+                <a:latin typeface="Helvetica" pitchFamily="2" charset="0"/>
+              </a:rPr>
+              <a:t>Petra Bleeker (</a:t>
+            </a:r>
+            <a:r>
+              <a:rPr lang="en-US" sz="1700" i="1" dirty="0">
+                <a:solidFill>
+                  <a:schemeClr val="tx1">
+                    <a:lumMod val="50000"/>
+                    <a:lumOff val="50000"/>
+                  </a:schemeClr>
+                </a:solidFill>
+                <a:latin typeface="Helvetica" pitchFamily="2" charset="0"/>
+                <a:hlinkClick r:id="rId4"/>
+              </a:rPr>
+              <a:t>p.m.bleeker@uva.nl</a:t>
+            </a:r>
+            <a:r>
+              <a:rPr lang="en-US" sz="1700" i="1" dirty="0">
+                <a:solidFill>
+                  <a:schemeClr val="tx1">
+                    <a:lumMod val="50000"/>
+                    <a:lumOff val="50000"/>
+                  </a:schemeClr>
+                </a:solidFill>
+                <a:latin typeface="Helvetica" pitchFamily="2" charset="0"/>
+              </a:rPr>
+              <a:t>)</a:t>
+            </a:r>
+          </a:p>
+        </p:txBody>
+      </p:sp>
+      <p:pic>
+        <p:nvPicPr>
+          <p:cNvPr id="10" name="Picture 9">
+            <a:extLst>
+              <a:ext uri="{FF2B5EF4-FFF2-40B4-BE49-F238E27FC236}">
+                <a16:creationId xmlns:a16="http://schemas.microsoft.com/office/drawing/2014/main" id="{B5C77762-172A-5413-3A56-55CB0406FD18}"/>
+              </a:ext>
+            </a:extLst>
+          </p:cNvPr>
+          <p:cNvPicPr>
+            <a:picLocks noChangeAspect="1"/>
+          </p:cNvPicPr>
+          <p:nvPr/>
+        </p:nvPicPr>
+        <p:blipFill>
+          <a:blip r:embed="rId5"/>
+          <a:stretch>
+            <a:fillRect/>
+          </a:stretch>
+        </p:blipFill>
+        <p:spPr>
+          <a:xfrm>
+            <a:off x="7234498" y="1778879"/>
+            <a:ext cx="4535276" cy="2551093"/>
+          </a:xfrm>
+          <a:prstGeom prst="rect">
+            <a:avLst/>
+          </a:prstGeom>
+        </p:spPr>
+      </p:pic>
+    </p:spTree>
+    <p:extLst>
+      <p:ext uri="{BB962C8B-B14F-4D97-AF65-F5344CB8AC3E}">
+        <p14:creationId xmlns:p14="http://schemas.microsoft.com/office/powerpoint/2010/main" val="1237806661"/>
+      </p:ext>
+    </p:extLst>
+  </p:cSld>
+  <p:clrMapOvr>
+    <a:masterClrMapping/>
+  </p:clrMapOvr>
+</p:sld>
+</file>
+
+<file path=ppt/slides/slide5.xml><?xml version="1.0" encoding="utf-8"?>
+<p:sld xmlns:a="http://schemas.openxmlformats.org/drawingml/2006/main" xmlns:r="http://schemas.openxmlformats.org/officeDocument/2006/relationships" xmlns:p="http://schemas.openxmlformats.org/presentationml/2006/main">
+  <p:cSld>
+    <p:spTree>
+      <p:nvGrpSpPr>
+        <p:cNvPr id="1" name=""/>
+        <p:cNvGrpSpPr/>
+        <p:nvPr/>
+      </p:nvGrpSpPr>
+      <p:grpSpPr>
+        <a:xfrm>
+          <a:off x="0" y="0"/>
+          <a:ext cx="0" cy="0"/>
+          <a:chOff x="0" y="0"/>
+          <a:chExt cx="0" cy="0"/>
+        </a:xfrm>
+      </p:grpSpPr>
+      <p:sp>
+        <p:nvSpPr>
+          <p:cNvPr id="2" name="Title 1">
+            <a:extLst>
+              <a:ext uri="{FF2B5EF4-FFF2-40B4-BE49-F238E27FC236}">
+                <a16:creationId xmlns:a16="http://schemas.microsoft.com/office/drawing/2014/main" id="{0DF1C52C-2F85-0B0F-CED5-0692F6667B70}"/>
+              </a:ext>
+            </a:extLst>
+          </p:cNvPr>
+          <p:cNvSpPr>
+            <a:spLocks noGrp="1"/>
+          </p:cNvSpPr>
+          <p:nvPr>
+            <p:ph type="title"/>
+          </p:nvPr>
+        </p:nvSpPr>
+        <p:spPr/>
+        <p:txBody>
+          <a:bodyPr/>
+          <a:lstStyle/>
+          <a:p>
+            <a:endParaRPr lang="en-NL" dirty="0"/>
+          </a:p>
+        </p:txBody>
+      </p:sp>
+      <p:sp>
+        <p:nvSpPr>
+          <p:cNvPr id="3" name="Content Placeholder 2">
+            <a:extLst>
+              <a:ext uri="{FF2B5EF4-FFF2-40B4-BE49-F238E27FC236}">
+                <a16:creationId xmlns:a16="http://schemas.microsoft.com/office/drawing/2014/main" id="{158C3EFA-7671-AD16-6FCC-E855819DC504}"/>
+              </a:ext>
+            </a:extLst>
+          </p:cNvPr>
+          <p:cNvSpPr>
+            <a:spLocks noGrp="1"/>
+          </p:cNvSpPr>
+          <p:nvPr>
+            <p:ph idx="1"/>
+          </p:nvPr>
+        </p:nvSpPr>
+        <p:spPr/>
+        <p:txBody>
+          <a:bodyPr/>
+          <a:lstStyle/>
+          <a:p>
+            <a:endParaRPr lang="en-NL"/>
+          </a:p>
+        </p:txBody>
+      </p:sp>
+      <p:pic>
+        <p:nvPicPr>
+          <p:cNvPr id="4" name="Picture 3">
+            <a:extLst>
+              <a:ext uri="{FF2B5EF4-FFF2-40B4-BE49-F238E27FC236}">
+                <a16:creationId xmlns:a16="http://schemas.microsoft.com/office/drawing/2014/main" id="{EC04DE24-8782-9F2D-FA1D-3CB3DFF953C4}"/>
+              </a:ext>
+            </a:extLst>
+          </p:cNvPr>
+          <p:cNvPicPr>
+            <a:picLocks noChangeAspect="1"/>
+          </p:cNvPicPr>
+          <p:nvPr/>
+        </p:nvPicPr>
+        <p:blipFill>
+          <a:blip r:embed="rId2"/>
+          <a:stretch>
+            <a:fillRect/>
+          </a:stretch>
+        </p:blipFill>
+        <p:spPr>
+          <a:xfrm>
+            <a:off x="190231" y="946468"/>
+            <a:ext cx="5801650" cy="4917886"/>
+          </a:xfrm>
+          <a:prstGeom prst="rect">
+            <a:avLst/>
+          </a:prstGeom>
+        </p:spPr>
+      </p:pic>
+      <p:pic>
+        <p:nvPicPr>
+          <p:cNvPr id="5" name="Picture 4">
+            <a:extLst>
+              <a:ext uri="{FF2B5EF4-FFF2-40B4-BE49-F238E27FC236}">
+                <a16:creationId xmlns:a16="http://schemas.microsoft.com/office/drawing/2014/main" id="{80DB6BA6-5E83-51DB-624F-A10D10605A95}"/>
+              </a:ext>
+            </a:extLst>
+          </p:cNvPr>
+          <p:cNvPicPr>
+            <a:picLocks noChangeAspect="1"/>
+          </p:cNvPicPr>
+          <p:nvPr/>
+        </p:nvPicPr>
+        <p:blipFill>
+          <a:blip r:embed="rId3"/>
+          <a:stretch>
+            <a:fillRect/>
+          </a:stretch>
+        </p:blipFill>
+        <p:spPr>
+          <a:xfrm>
+            <a:off x="6096000" y="1951354"/>
+            <a:ext cx="6045252" cy="4794885"/>
+          </a:xfrm>
+          <a:prstGeom prst="rect">
+            <a:avLst/>
+          </a:prstGeom>
+        </p:spPr>
+      </p:pic>
+      <p:sp>
+        <p:nvSpPr>
+          <p:cNvPr id="6" name="Rectangle 5">
+            <a:extLst>
+              <a:ext uri="{FF2B5EF4-FFF2-40B4-BE49-F238E27FC236}">
+                <a16:creationId xmlns:a16="http://schemas.microsoft.com/office/drawing/2014/main" id="{0160AEF9-7889-1935-08D6-44C4008B39E5}"/>
+              </a:ext>
+            </a:extLst>
+          </p:cNvPr>
+          <p:cNvSpPr/>
+          <p:nvPr/>
+        </p:nvSpPr>
+        <p:spPr>
+          <a:xfrm>
+            <a:off x="0" y="1"/>
+            <a:ext cx="12192000" cy="811530"/>
+          </a:xfrm>
+          <a:prstGeom prst="rect">
+            <a:avLst/>
+          </a:prstGeom>
+          <a:solidFill>
+            <a:schemeClr val="tx2">
+              <a:lumMod val="75000"/>
+              <a:lumOff val="25000"/>
+            </a:schemeClr>
+          </a:solidFill>
+          <a:ln w="6350"/>
+        </p:spPr>
+        <p:style>
+          <a:lnRef idx="2">
+            <a:schemeClr val="accent1">
+              <a:shade val="15000"/>
+            </a:schemeClr>
+          </a:lnRef>
+          <a:fillRef idx="1">
+            <a:schemeClr val="accent1"/>
+          </a:fillRef>
+          <a:effectRef idx="0">
+            <a:schemeClr val="accent1"/>
+          </a:effectRef>
+          <a:fontRef idx="minor">
+            <a:schemeClr val="lt1"/>
+          </a:fontRef>
+        </p:style>
+        <p:txBody>
+          <a:bodyPr rtlCol="0" anchor="ctr"/>
+          <a:lstStyle/>
+          <a:p>
+            <a:pPr algn="ctr"/>
+            <a:endParaRPr lang="en-US"/>
+          </a:p>
+        </p:txBody>
+      </p:sp>
+      <p:sp>
+        <p:nvSpPr>
+          <p:cNvPr id="7" name="TextBox 6">
+            <a:extLst>
+              <a:ext uri="{FF2B5EF4-FFF2-40B4-BE49-F238E27FC236}">
+                <a16:creationId xmlns:a16="http://schemas.microsoft.com/office/drawing/2014/main" id="{64FC4D9A-E8A3-A8EE-E441-149B4F6CD5F7}"/>
+              </a:ext>
+            </a:extLst>
+          </p:cNvPr>
+          <p:cNvSpPr txBox="1"/>
+          <p:nvPr/>
+        </p:nvSpPr>
+        <p:spPr>
+          <a:xfrm>
+            <a:off x="190231" y="113378"/>
+            <a:ext cx="2005677" cy="584775"/>
+          </a:xfrm>
+          <a:prstGeom prst="rect">
+            <a:avLst/>
+          </a:prstGeom>
+          <a:noFill/>
+        </p:spPr>
+        <p:txBody>
+          <a:bodyPr wrap="none" rtlCol="0">
+            <a:spAutoFit/>
+          </a:bodyPr>
+          <a:lstStyle/>
+          <a:p>
+            <a:r>
+              <a:rPr lang="en-US" sz="3200" b="1" dirty="0">
+                <a:solidFill>
+                  <a:schemeClr val="bg1"/>
+                </a:solidFill>
+                <a:latin typeface="Helvetica" pitchFamily="2" charset="0"/>
+              </a:rPr>
+              <a:t>Schedule</a:t>
+            </a:r>
+          </a:p>
+        </p:txBody>
+      </p:sp>
+    </p:spTree>
+    <p:extLst>
+      <p:ext uri="{BB962C8B-B14F-4D97-AF65-F5344CB8AC3E}">
+        <p14:creationId xmlns:p14="http://schemas.microsoft.com/office/powerpoint/2010/main" val="2264406087"/>
+      </p:ext>
+    </p:extLst>
+  </p:cSld>
+  <p:clrMapOvr>
+    <a:masterClrMapping/>
+  </p:clrMapOvr>
+</p:sld>
+</file>
+
+<file path=ppt/slides/slide6.xml><?xml version="1.0" encoding="utf-8"?>
+<p:sld xmlns:a="http://schemas.openxmlformats.org/drawingml/2006/main" xmlns:r="http://schemas.openxmlformats.org/officeDocument/2006/relationships" xmlns:p="http://schemas.openxmlformats.org/presentationml/2006/main">
+  <p:cSld>
+    <p:spTree>
+      <p:nvGrpSpPr>
+        <p:cNvPr id="1" name=""/>
+        <p:cNvGrpSpPr/>
+        <p:nvPr/>
+      </p:nvGrpSpPr>
+      <p:grpSpPr>
+        <a:xfrm>
+          <a:off x="0" y="0"/>
+          <a:ext cx="0" cy="0"/>
+          <a:chOff x="0" y="0"/>
+          <a:chExt cx="0" cy="0"/>
+        </a:xfrm>
+      </p:grpSpPr>
+      <p:sp>
+        <p:nvSpPr>
+          <p:cNvPr id="6" name="TextBox 5">
+            <a:extLst>
+              <a:ext uri="{FF2B5EF4-FFF2-40B4-BE49-F238E27FC236}">
+                <a16:creationId xmlns:a16="http://schemas.microsoft.com/office/drawing/2014/main" id="{D29251DE-E46B-0433-0B59-5BF14EEC2A58}"/>
+              </a:ext>
+            </a:extLst>
+          </p:cNvPr>
+          <p:cNvSpPr txBox="1"/>
+          <p:nvPr/>
+        </p:nvSpPr>
+        <p:spPr>
+          <a:xfrm>
+            <a:off x="6244361" y="1131600"/>
+            <a:ext cx="5404236" cy="2129686"/>
+          </a:xfrm>
+          <a:prstGeom prst="rect">
+            <a:avLst/>
+          </a:prstGeom>
+          <a:noFill/>
+        </p:spPr>
+        <p:txBody>
+          <a:bodyPr wrap="none" rtlCol="0">
+            <a:spAutoFit/>
+          </a:bodyPr>
+          <a:lstStyle/>
+          <a:p>
+            <a:pPr>
+              <a:lnSpc>
+                <a:spcPct val="150000"/>
+              </a:lnSpc>
+            </a:pPr>
+            <a:r>
+              <a:rPr lang="en-US" b="1" dirty="0">
+                <a:latin typeface="Helvetica" pitchFamily="2" charset="0"/>
+              </a:rPr>
+              <a:t>Teachers: </a:t>
+            </a:r>
+          </a:p>
+          <a:p>
+            <a:pPr>
+              <a:lnSpc>
+                <a:spcPct val="150000"/>
+              </a:lnSpc>
+            </a:pPr>
+            <a:r>
+              <a:rPr lang="en-US" dirty="0">
+                <a:latin typeface="Helvetica" pitchFamily="2" charset="0"/>
+              </a:rPr>
+              <a:t>Misha Paauw (Plant Physiology, SILS)</a:t>
+            </a:r>
+          </a:p>
+          <a:p>
+            <a:pPr>
+              <a:lnSpc>
+                <a:spcPct val="150000"/>
+              </a:lnSpc>
+            </a:pPr>
+            <a:r>
+              <a:rPr lang="en-US" dirty="0">
+                <a:latin typeface="Helvetica" pitchFamily="2" charset="0"/>
+              </a:rPr>
+              <a:t>Tijs Bliek (Plant Development &amp; Genetics. SILS)</a:t>
+            </a:r>
+          </a:p>
+          <a:p>
+            <a:pPr>
+              <a:lnSpc>
+                <a:spcPct val="150000"/>
+              </a:lnSpc>
+            </a:pPr>
+            <a:r>
+              <a:rPr lang="en-US" dirty="0">
+                <a:latin typeface="Helvetica" pitchFamily="2" charset="0"/>
+              </a:rPr>
+              <a:t>Aalt-Jan van Dijk (Biosystems Data Analysis, SILS)</a:t>
+            </a:r>
+          </a:p>
+          <a:p>
+            <a:pPr>
+              <a:lnSpc>
+                <a:spcPct val="150000"/>
+              </a:lnSpc>
+            </a:pPr>
+            <a:r>
+              <a:rPr lang="en-US" dirty="0">
+                <a:latin typeface="Helvetica" pitchFamily="2" charset="0"/>
+              </a:rPr>
+              <a:t>Kyran Wissink (Biosystems Data Analysis, SILS)</a:t>
+            </a:r>
+          </a:p>
+        </p:txBody>
+      </p:sp>
+      <p:sp>
+        <p:nvSpPr>
+          <p:cNvPr id="8" name="TextBox 7">
+            <a:extLst>
+              <a:ext uri="{FF2B5EF4-FFF2-40B4-BE49-F238E27FC236}">
+                <a16:creationId xmlns:a16="http://schemas.microsoft.com/office/drawing/2014/main" id="{AE42D9FB-2D59-87C9-CE81-E070566A0578}"/>
+              </a:ext>
+            </a:extLst>
+          </p:cNvPr>
+          <p:cNvSpPr txBox="1"/>
+          <p:nvPr/>
+        </p:nvSpPr>
+        <p:spPr>
+          <a:xfrm>
+            <a:off x="543403" y="1131600"/>
+            <a:ext cx="5036507" cy="1714187"/>
+          </a:xfrm>
+          <a:prstGeom prst="rect">
+            <a:avLst/>
+          </a:prstGeom>
+          <a:noFill/>
+        </p:spPr>
+        <p:txBody>
+          <a:bodyPr wrap="none" rtlCol="0">
+            <a:spAutoFit/>
+          </a:bodyPr>
+          <a:lstStyle/>
+          <a:p>
+            <a:pPr>
+              <a:lnSpc>
+                <a:spcPct val="150000"/>
+              </a:lnSpc>
+            </a:pPr>
+            <a:r>
+              <a:rPr lang="en-US" b="1" dirty="0">
+                <a:latin typeface="Helvetica" pitchFamily="2" charset="0"/>
+              </a:rPr>
+              <a:t>Teaching activities (% of total workload):</a:t>
+            </a:r>
+          </a:p>
+          <a:p>
+            <a:pPr>
+              <a:lnSpc>
+                <a:spcPct val="150000"/>
+              </a:lnSpc>
+            </a:pPr>
+            <a:r>
+              <a:rPr lang="en-US" dirty="0">
+                <a:latin typeface="Helvetica" pitchFamily="2" charset="0"/>
+              </a:rPr>
+              <a:t>Lectures 25%</a:t>
+            </a:r>
+          </a:p>
+          <a:p>
+            <a:pPr>
+              <a:lnSpc>
+                <a:spcPct val="150000"/>
+              </a:lnSpc>
+            </a:pPr>
+            <a:r>
+              <a:rPr lang="en-US" dirty="0">
+                <a:latin typeface="Helvetica" pitchFamily="2" charset="0"/>
+              </a:rPr>
+              <a:t>Tutorials (live-coding computer practicals): 50%</a:t>
+            </a:r>
+          </a:p>
+          <a:p>
+            <a:pPr>
+              <a:lnSpc>
+                <a:spcPct val="150000"/>
+              </a:lnSpc>
+            </a:pPr>
+            <a:r>
+              <a:rPr lang="en-US" dirty="0">
+                <a:latin typeface="Helvetica" pitchFamily="2" charset="0"/>
+              </a:rPr>
+              <a:t>Assignment: 25%</a:t>
+            </a:r>
+          </a:p>
+        </p:txBody>
+      </p:sp>
+      <p:sp>
+        <p:nvSpPr>
+          <p:cNvPr id="9" name="TextBox 8">
+            <a:extLst>
+              <a:ext uri="{FF2B5EF4-FFF2-40B4-BE49-F238E27FC236}">
+                <a16:creationId xmlns:a16="http://schemas.microsoft.com/office/drawing/2014/main" id="{DA69392B-6AAB-5AFB-DD6D-14BB9648FBF5}"/>
+              </a:ext>
+            </a:extLst>
+          </p:cNvPr>
+          <p:cNvSpPr txBox="1"/>
+          <p:nvPr/>
+        </p:nvSpPr>
+        <p:spPr>
+          <a:xfrm>
+            <a:off x="543403" y="3153573"/>
+            <a:ext cx="1960793" cy="883190"/>
+          </a:xfrm>
+          <a:prstGeom prst="rect">
+            <a:avLst/>
+          </a:prstGeom>
+          <a:noFill/>
+        </p:spPr>
+        <p:txBody>
+          <a:bodyPr wrap="none" rtlCol="0">
+            <a:spAutoFit/>
+          </a:bodyPr>
+          <a:lstStyle/>
+          <a:p>
+            <a:pPr>
+              <a:lnSpc>
+                <a:spcPct val="150000"/>
+              </a:lnSpc>
+            </a:pPr>
+            <a:r>
+              <a:rPr lang="en-US" b="1" dirty="0">
+                <a:latin typeface="Helvetica" pitchFamily="2" charset="0"/>
+              </a:rPr>
+              <a:t>Assessment:</a:t>
+            </a:r>
+          </a:p>
+          <a:p>
+            <a:pPr marL="285750" indent="-285750">
+              <a:lnSpc>
+                <a:spcPct val="150000"/>
+              </a:lnSpc>
+              <a:buFont typeface="Arial" panose="020B0604020202020204" pitchFamily="34" charset="0"/>
+              <a:buChar char="•"/>
+            </a:pPr>
+            <a:r>
+              <a:rPr lang="en-US" dirty="0">
+                <a:latin typeface="Helvetica" pitchFamily="2" charset="0"/>
+              </a:rPr>
+              <a:t>2x assignment</a:t>
+            </a:r>
+          </a:p>
+        </p:txBody>
+      </p:sp>
+      <p:sp>
+        <p:nvSpPr>
+          <p:cNvPr id="11" name="Rectangle 10">
+            <a:extLst>
+              <a:ext uri="{FF2B5EF4-FFF2-40B4-BE49-F238E27FC236}">
+                <a16:creationId xmlns:a16="http://schemas.microsoft.com/office/drawing/2014/main" id="{0C3719E3-A412-3D77-EEAA-4A14FADE334D}"/>
+              </a:ext>
+            </a:extLst>
+          </p:cNvPr>
+          <p:cNvSpPr/>
+          <p:nvPr/>
+        </p:nvSpPr>
+        <p:spPr>
+          <a:xfrm>
+            <a:off x="0" y="1"/>
+            <a:ext cx="12192000" cy="811530"/>
+          </a:xfrm>
+          <a:prstGeom prst="rect">
+            <a:avLst/>
+          </a:prstGeom>
+          <a:solidFill>
+            <a:schemeClr val="tx2">
+              <a:lumMod val="75000"/>
+              <a:lumOff val="25000"/>
+            </a:schemeClr>
+          </a:solidFill>
+          <a:ln w="6350"/>
+        </p:spPr>
+        <p:style>
+          <a:lnRef idx="2">
+            <a:schemeClr val="accent1">
+              <a:shade val="15000"/>
+            </a:schemeClr>
+          </a:lnRef>
+          <a:fillRef idx="1">
+            <a:schemeClr val="accent1"/>
+          </a:fillRef>
+          <a:effectRef idx="0">
+            <a:schemeClr val="accent1"/>
+          </a:effectRef>
+          <a:fontRef idx="minor">
+            <a:schemeClr val="lt1"/>
+          </a:fontRef>
+        </p:style>
+        <p:txBody>
+          <a:bodyPr rtlCol="0" anchor="ctr"/>
+          <a:lstStyle/>
+          <a:p>
+            <a:pPr algn="ctr"/>
+            <a:endParaRPr lang="en-US"/>
+          </a:p>
+        </p:txBody>
+      </p:sp>
+      <p:sp>
+        <p:nvSpPr>
           <p:cNvPr id="13" name="TextBox 12">
             <a:extLst>
               <a:ext uri="{FF2B5EF4-FFF2-40B4-BE49-F238E27FC236}">
@@ -5735,14 +6919,14 @@
               <a:rPr lang="en-US" i="1" strike="noStrike" dirty="0">
                 <a:effectLst/>
                 <a:latin typeface="Helvetica" pitchFamily="2" charset="0"/>
-                <a:hlinkClick r:id="rId2"/>
+                <a:hlinkClick r:id="rId3"/>
               </a:rPr>
               <a:t>m.m.</a:t>
             </a:r>
             <a:r>
               <a:rPr lang="en-US" i="1" dirty="0">
                 <a:latin typeface="Helvetica" pitchFamily="2" charset="0"/>
-                <a:hlinkClick r:id="rId2"/>
+                <a:hlinkClick r:id="rId3"/>
               </a:rPr>
               <a:t>paauw</a:t>
             </a:r>
@@ -5750,7 +6934,7 @@
               <a:rPr lang="en-US" i="1" strike="noStrike" dirty="0">
                 <a:effectLst/>
                 <a:latin typeface="Helvetica" pitchFamily="2" charset="0"/>
-                <a:hlinkClick r:id="rId2"/>
+                <a:hlinkClick r:id="rId3"/>
               </a:rPr>
               <a:t>@uva.nl</a:t>
             </a:r>
@@ -5872,6 +7056,176 @@
   <p:clrMapOvr>
     <a:masterClrMapping/>
   </p:clrMapOvr>
+  <p:timing>
+    <p:tnLst>
+      <p:par>
+        <p:cTn id="1" dur="indefinite" restart="never" nodeType="tmRoot">
+          <p:childTnLst>
+            <p:seq concurrent="1" nextAc="seek">
+              <p:cTn id="2" dur="indefinite" nodeType="mainSeq">
+                <p:childTnLst>
+                  <p:par>
+                    <p:cTn id="3" fill="hold">
+                      <p:stCondLst>
+                        <p:cond delay="indefinite"/>
+                      </p:stCondLst>
+                      <p:childTnLst>
+                        <p:par>
+                          <p:cTn id="4" fill="hold">
+                            <p:stCondLst>
+                              <p:cond delay="0"/>
+                            </p:stCondLst>
+                            <p:childTnLst>
+                              <p:par>
+                                <p:cTn id="5" presetID="1" presetClass="entr" presetSubtype="0" fill="hold" grpId="0" nodeType="clickEffect">
+                                  <p:stCondLst>
+                                    <p:cond delay="0"/>
+                                  </p:stCondLst>
+                                  <p:childTnLst>
+                                    <p:set>
+                                      <p:cBhvr>
+                                        <p:cTn id="6" dur="1" fill="hold">
+                                          <p:stCondLst>
+                                            <p:cond delay="0"/>
+                                          </p:stCondLst>
+                                        </p:cTn>
+                                        <p:tgtEl>
+                                          <p:spTgt spid="6"/>
+                                        </p:tgtEl>
+                                        <p:attrNameLst>
+                                          <p:attrName>style.visibility</p:attrName>
+                                        </p:attrNameLst>
+                                      </p:cBhvr>
+                                      <p:to>
+                                        <p:strVal val="visible"/>
+                                      </p:to>
+                                    </p:set>
+                                  </p:childTnLst>
+                                </p:cTn>
+                              </p:par>
+                            </p:childTnLst>
+                          </p:cTn>
+                        </p:par>
+                      </p:childTnLst>
+                    </p:cTn>
+                  </p:par>
+                  <p:par>
+                    <p:cTn id="7" fill="hold">
+                      <p:stCondLst>
+                        <p:cond delay="indefinite"/>
+                      </p:stCondLst>
+                      <p:childTnLst>
+                        <p:par>
+                          <p:cTn id="8" fill="hold">
+                            <p:stCondLst>
+                              <p:cond delay="0"/>
+                            </p:stCondLst>
+                            <p:childTnLst>
+                              <p:par>
+                                <p:cTn id="9" presetID="1" presetClass="entr" presetSubtype="0" fill="hold" grpId="0" nodeType="clickEffect">
+                                  <p:stCondLst>
+                                    <p:cond delay="0"/>
+                                  </p:stCondLst>
+                                  <p:childTnLst>
+                                    <p:set>
+                                      <p:cBhvr>
+                                        <p:cTn id="10" dur="1" fill="hold">
+                                          <p:stCondLst>
+                                            <p:cond delay="0"/>
+                                          </p:stCondLst>
+                                        </p:cTn>
+                                        <p:tgtEl>
+                                          <p:spTgt spid="9"/>
+                                        </p:tgtEl>
+                                        <p:attrNameLst>
+                                          <p:attrName>style.visibility</p:attrName>
+                                        </p:attrNameLst>
+                                      </p:cBhvr>
+                                      <p:to>
+                                        <p:strVal val="visible"/>
+                                      </p:to>
+                                    </p:set>
+                                  </p:childTnLst>
+                                </p:cTn>
+                              </p:par>
+                            </p:childTnLst>
+                          </p:cTn>
+                        </p:par>
+                      </p:childTnLst>
+                    </p:cTn>
+                  </p:par>
+                  <p:par>
+                    <p:cTn id="11" fill="hold">
+                      <p:stCondLst>
+                        <p:cond delay="indefinite"/>
+                      </p:stCondLst>
+                      <p:childTnLst>
+                        <p:par>
+                          <p:cTn id="12" fill="hold">
+                            <p:stCondLst>
+                              <p:cond delay="0"/>
+                            </p:stCondLst>
+                            <p:childTnLst>
+                              <p:par>
+                                <p:cTn id="13" presetID="1" presetClass="entr" presetSubtype="0" fill="hold" grpId="0" nodeType="clickEffect">
+                                  <p:stCondLst>
+                                    <p:cond delay="0"/>
+                                  </p:stCondLst>
+                                  <p:childTnLst>
+                                    <p:set>
+                                      <p:cBhvr>
+                                        <p:cTn id="14" dur="1" fill="hold">
+                                          <p:stCondLst>
+                                            <p:cond delay="0"/>
+                                          </p:stCondLst>
+                                        </p:cTn>
+                                        <p:tgtEl>
+                                          <p:spTgt spid="2"/>
+                                        </p:tgtEl>
+                                        <p:attrNameLst>
+                                          <p:attrName>style.visibility</p:attrName>
+                                        </p:attrNameLst>
+                                      </p:cBhvr>
+                                      <p:to>
+                                        <p:strVal val="visible"/>
+                                      </p:to>
+                                    </p:set>
+                                  </p:childTnLst>
+                                </p:cTn>
+                              </p:par>
+                            </p:childTnLst>
+                          </p:cTn>
+                        </p:par>
+                      </p:childTnLst>
+                    </p:cTn>
+                  </p:par>
+                </p:childTnLst>
+              </p:cTn>
+              <p:prevCondLst>
+                <p:cond evt="onPrev" delay="0">
+                  <p:tgtEl>
+                    <p:sldTgt/>
+                  </p:tgtEl>
+                </p:cond>
+              </p:prevCondLst>
+              <p:nextCondLst>
+                <p:cond evt="onNext" delay="0">
+                  <p:tgtEl>
+                    <p:sldTgt/>
+                  </p:tgtEl>
+                </p:cond>
+              </p:nextCondLst>
+            </p:seq>
+          </p:childTnLst>
+        </p:cTn>
+      </p:par>
+    </p:tnLst>
+    <p:bldLst>
+      <p:bldP spid="6" grpId="0"/>
+      <p:bldP spid="9" grpId="0"/>
+      <p:bldP spid="2" grpId="0"/>
+    </p:bldLst>
+  </p:timing>
 </p:sld>
 </file>
 
